--- a/COLpama_中間発表.pptx
+++ b/COLpama_中間発表.pptx
@@ -15,9 +15,10 @@
     <p:sldId id="263" r:id="rId9"/>
     <p:sldId id="264" r:id="rId10"/>
     <p:sldId id="265" r:id="rId11"/>
+    <p:sldId id="266" r:id="rId12"/>
   </p:sldIdLst>
   <p:notesMasterIdLst>
-    <p:notesMasterId r:id="rId12"/>
+    <p:notesMasterId r:id="rId13"/>
   </p:notesMasterIdLst>
   <p:sldSz cx="12192000" cy="6858000"/>
   <p:notesSz cx="6858000" cy="12192000"/>
@@ -623,6 +624,94 @@
             <a:fld id="{F7021451-1387-4CA6-816F-3879F97B5CBC}" type="slidenum">
               <a:rPr lang="en-US"/>
               <a:t>10</a:t>
+            </a:fld>
+            <a:endParaRPr lang="en-US"/>
+          </a:p>
+        </p:txBody>
+      </p:sp>
+    </p:spTree>
+    <p:extLst>
+      <p:ext uri="{BB962C8B-B14F-4D97-AF65-F5344CB8AC3E}">
+        <p14:creationId xmlns:p14="http://schemas.microsoft.com/office/powerpoint/2010/main" val="1024086991"/>
+      </p:ext>
+    </p:extLst>
+  </p:cSld>
+  <p:clrMapOvr>
+    <a:masterClrMapping/>
+  </p:clrMapOvr>
+</p:notes>
+</file>
+
+<file path=ppt/notesSlides/notesSlide11.xml><?xml version="1.0" encoding="utf-8"?>
+<p:notes xmlns:a="http://schemas.openxmlformats.org/drawingml/2006/main" xmlns:r="http://schemas.openxmlformats.org/officeDocument/2006/relationships" xmlns:p="http://schemas.openxmlformats.org/presentationml/2006/main">
+  <p:cSld>
+    <p:spTree>
+      <p:nvGrpSpPr>
+        <p:cNvPr id="1" name=""/>
+        <p:cNvGrpSpPr/>
+        <p:nvPr/>
+      </p:nvGrpSpPr>
+      <p:grpSpPr>
+        <a:xfrm>
+          <a:off x="0" y="0"/>
+          <a:ext cx="0" cy="0"/>
+          <a:chOff x="0" y="0"/>
+          <a:chExt cx="0" cy="0"/>
+        </a:xfrm>
+      </p:grpSpPr>
+      <p:sp>
+        <p:nvSpPr>
+          <p:cNvPr id="2" name="Slide Image Placeholder 1"/>
+          <p:cNvSpPr>
+            <a:spLocks noGrp="1" noRot="1" noChangeAspect="1"/>
+          </p:cNvSpPr>
+          <p:nvPr>
+            <p:ph type="sldImg"/>
+          </p:nvPr>
+        </p:nvSpPr>
+        <p:spPr/>
+      </p:sp>
+      <p:sp>
+        <p:nvSpPr>
+          <p:cNvPr id="3" name="Notes Placeholder 2"/>
+          <p:cNvSpPr>
+            <a:spLocks noGrp="1"/>
+          </p:cNvSpPr>
+          <p:nvPr>
+            <p:ph type="body" idx="1"/>
+          </p:nvPr>
+        </p:nvSpPr>
+        <p:spPr/>
+        <p:txBody>
+          <a:bodyPr/>
+          <a:lstStyle/>
+          <a:p>
+            <a:r>
+              <a:rPr lang="en-US" dirty="0"/>
+              <a:t/>
+            </a:r>
+            <a:endParaRPr lang="en-US" dirty="0"/>
+          </a:p>
+        </p:txBody>
+      </p:sp>
+      <p:sp>
+        <p:nvSpPr>
+          <p:cNvPr id="4" name="Slide Number Placeholder 3"/>
+          <p:cNvSpPr>
+            <a:spLocks noGrp="1"/>
+          </p:cNvSpPr>
+          <p:nvPr>
+            <p:ph type="sldNum" sz="quarter" idx="10"/>
+          </p:nvPr>
+        </p:nvSpPr>
+        <p:spPr/>
+        <p:txBody>
+          <a:bodyPr/>
+          <a:lstStyle/>
+          <a:p>
+            <a:fld id="{F7021451-1387-4CA6-816F-3879F97B5CBC}" type="slidenum">
+              <a:rPr lang="en-US"/>
+              <a:t>11</a:t>
             </a:fld>
             <a:endParaRPr lang="en-US"/>
           </a:p>
@@ -1909,6 +1998,485 @@
     <p:bg>
       <p:bgPr>
         <a:solidFill>
+          <a:srgbClr val="3B1D35"/>
+        </a:solidFill>
+      </p:bgPr>
+    </p:bg>
+    <p:spTree>
+      <p:nvGrpSpPr>
+        <p:cNvPr id="1" name=""/>
+        <p:cNvGrpSpPr/>
+        <p:nvPr/>
+      </p:nvGrpSpPr>
+      <p:grpSpPr>
+        <a:xfrm>
+          <a:off x="0" y="0"/>
+          <a:ext cx="0" cy="0"/>
+          <a:chOff x="0" y="0"/>
+          <a:chExt cx="0" cy="0"/>
+        </a:xfrm>
+      </p:grpSpPr>
+      <p:sp>
+        <p:nvSpPr>
+          <p:cNvPr id="2" name="Text 0"/>
+          <p:cNvSpPr/>
+          <p:nvPr/>
+        </p:nvSpPr>
+        <p:spPr>
+          <a:xfrm>
+            <a:off x="640080" y="457200"/>
+            <a:ext cx="10058400" cy="640080"/>
+          </a:xfrm>
+          <a:prstGeom prst="rect">
+            <a:avLst/>
+          </a:prstGeom>
+          <a:noFill/>
+          <a:ln/>
+        </p:spPr>
+        <p:txBody>
+          <a:bodyPr wrap="square" lIns="0" tIns="0" rIns="0" bIns="0" rtlCol="0" anchor="ctr"/>
+          <a:lstStyle/>
+          <a:p>
+            <a:pPr indent="0" marL="0">
+              <a:buNone/>
+            </a:pPr>
+            <a:r>
+              <a:rPr lang="en-US" sz="3000" b="1" dirty="0">
+                <a:solidFill>
+                  <a:srgbClr val="FFFFFF"/>
+                </a:solidFill>
+                <a:latin typeface="Yu Gothic" pitchFamily="34" charset="0"/>
+                <a:ea typeface="Yu Gothic" pitchFamily="34" charset="-122"/>
+                <a:cs typeface="Yu Gothic" pitchFamily="34" charset="-120"/>
+              </a:rPr>
+              <a:t>こだわった点・工夫</a:t>
+            </a:r>
+            <a:endParaRPr lang="en-US" sz="3000" dirty="0"/>
+          </a:p>
+        </p:txBody>
+      </p:sp>
+      <p:sp>
+        <p:nvSpPr>
+          <p:cNvPr id="3" name="Shape 1"/>
+          <p:cNvSpPr/>
+          <p:nvPr/>
+        </p:nvSpPr>
+        <p:spPr>
+          <a:xfrm>
+            <a:off x="640080" y="1508760"/>
+            <a:ext cx="10881360" cy="1143000"/>
+          </a:xfrm>
+          <a:prstGeom prst="roundRect">
+            <a:avLst>
+              <a:gd name="adj" fmla="val 8000"/>
+            </a:avLst>
+          </a:prstGeom>
+          <a:solidFill>
+            <a:srgbClr val="E6A5F8">
+              <a:alpha val="10000"/>
+            </a:srgbClr>
+          </a:solidFill>
+          <a:ln/>
+        </p:spPr>
+      </p:sp>
+      <p:sp>
+        <p:nvSpPr>
+          <p:cNvPr id="4" name="Text 2"/>
+          <p:cNvSpPr/>
+          <p:nvPr/>
+        </p:nvSpPr>
+        <p:spPr>
+          <a:xfrm>
+            <a:off x="914400" y="1618488"/>
+            <a:ext cx="3291840" cy="914400"/>
+          </a:xfrm>
+          <a:prstGeom prst="rect">
+            <a:avLst/>
+          </a:prstGeom>
+          <a:noFill/>
+          <a:ln/>
+        </p:spPr>
+        <p:txBody>
+          <a:bodyPr wrap="square" lIns="0" tIns="0" rIns="0" bIns="0" rtlCol="0" anchor="ctr"/>
+          <a:lstStyle/>
+          <a:p>
+            <a:pPr indent="0" marL="0">
+              <a:buNone/>
+            </a:pPr>
+            <a:r>
+              <a:rPr lang="en-US" sz="1600" b="1" dirty="0">
+                <a:solidFill>
+                  <a:srgbClr val="FF6F9F"/>
+                </a:solidFill>
+                <a:latin typeface="Yu Gothic" pitchFamily="34" charset="0"/>
+                <a:ea typeface="Yu Gothic" pitchFamily="34" charset="-122"/>
+                <a:cs typeface="Yu Gothic" pitchFamily="34" charset="-120"/>
+              </a:rPr>
+              <a:t>リアルタイム色プレビュー</a:t>
+            </a:r>
+            <a:endParaRPr lang="en-US" sz="1600" dirty="0"/>
+          </a:p>
+        </p:txBody>
+      </p:sp>
+      <p:sp>
+        <p:nvSpPr>
+          <p:cNvPr id="5" name="Text 3"/>
+          <p:cNvSpPr/>
+          <p:nvPr/>
+        </p:nvSpPr>
+        <p:spPr>
+          <a:xfrm>
+            <a:off x="4389120" y="1618488"/>
+            <a:ext cx="6949440" cy="914400"/>
+          </a:xfrm>
+          <a:prstGeom prst="rect">
+            <a:avLst/>
+          </a:prstGeom>
+          <a:noFill/>
+          <a:ln/>
+        </p:spPr>
+        <p:txBody>
+          <a:bodyPr wrap="square" lIns="0" tIns="0" rIns="0" bIns="0" rtlCol="0" anchor="ctr"/>
+          <a:lstStyle/>
+          <a:p>
+            <a:pPr indent="0" marL="0">
+              <a:buNone/>
+            </a:pPr>
+            <a:r>
+              <a:rPr lang="en-US" sz="1300" dirty="0">
+                <a:solidFill>
+                  <a:srgbClr val="FFFFFF"/>
+                </a:solidFill>
+                <a:latin typeface="Yu Gothic" pitchFamily="34" charset="0"/>
+                <a:ea typeface="Yu Gothic" pitchFamily="34" charset="-122"/>
+                <a:cs typeface="Yu Gothic" pitchFamily="34" charset="-120"/>
+              </a:rPr>
+              <a:t>スポイトを動かすたびに色コードとカラーピッカーの位置が連動して更新される</a:t>
+            </a:r>
+            <a:endParaRPr lang="en-US" sz="1300" dirty="0"/>
+          </a:p>
+        </p:txBody>
+      </p:sp>
+      <p:sp>
+        <p:nvSpPr>
+          <p:cNvPr id="6" name="Shape 4"/>
+          <p:cNvSpPr/>
+          <p:nvPr/>
+        </p:nvSpPr>
+        <p:spPr>
+          <a:xfrm>
+            <a:off x="640080" y="2807208"/>
+            <a:ext cx="10881360" cy="1143000"/>
+          </a:xfrm>
+          <a:prstGeom prst="roundRect">
+            <a:avLst>
+              <a:gd name="adj" fmla="val 8000"/>
+            </a:avLst>
+          </a:prstGeom>
+          <a:solidFill>
+            <a:srgbClr val="E6A5F8">
+              <a:alpha val="10000"/>
+            </a:srgbClr>
+          </a:solidFill>
+          <a:ln/>
+        </p:spPr>
+      </p:sp>
+      <p:sp>
+        <p:nvSpPr>
+          <p:cNvPr id="7" name="Text 5"/>
+          <p:cNvSpPr/>
+          <p:nvPr/>
+        </p:nvSpPr>
+        <p:spPr>
+          <a:xfrm>
+            <a:off x="914400" y="2916936"/>
+            <a:ext cx="3291840" cy="914400"/>
+          </a:xfrm>
+          <a:prstGeom prst="rect">
+            <a:avLst/>
+          </a:prstGeom>
+          <a:noFill/>
+          <a:ln/>
+        </p:spPr>
+        <p:txBody>
+          <a:bodyPr wrap="square" lIns="0" tIns="0" rIns="0" bIns="0" rtlCol="0" anchor="ctr"/>
+          <a:lstStyle/>
+          <a:p>
+            <a:pPr indent="0" marL="0">
+              <a:buNone/>
+            </a:pPr>
+            <a:r>
+              <a:rPr lang="en-US" sz="1600" b="1" dirty="0">
+                <a:solidFill>
+                  <a:srgbClr val="FF6F9F"/>
+                </a:solidFill>
+                <a:latin typeface="Yu Gothic" pitchFamily="34" charset="0"/>
+                <a:ea typeface="Yu Gothic" pitchFamily="34" charset="-122"/>
+                <a:cs typeface="Yu Gothic" pitchFamily="34" charset="-120"/>
+              </a:rPr>
+              <a:t>自作カラーピッカー</a:t>
+            </a:r>
+            <a:endParaRPr lang="en-US" sz="1600" dirty="0"/>
+          </a:p>
+        </p:txBody>
+      </p:sp>
+      <p:sp>
+        <p:nvSpPr>
+          <p:cNvPr id="8" name="Text 6"/>
+          <p:cNvSpPr/>
+          <p:nvPr/>
+        </p:nvSpPr>
+        <p:spPr>
+          <a:xfrm>
+            <a:off x="4389120" y="2916936"/>
+            <a:ext cx="6949440" cy="914400"/>
+          </a:xfrm>
+          <a:prstGeom prst="rect">
+            <a:avLst/>
+          </a:prstGeom>
+          <a:noFill/>
+          <a:ln/>
+        </p:spPr>
+        <p:txBody>
+          <a:bodyPr wrap="square" lIns="0" tIns="0" rIns="0" bIns="0" rtlCol="0" anchor="ctr"/>
+          <a:lstStyle/>
+          <a:p>
+            <a:pPr indent="0" marL="0">
+              <a:buNone/>
+            </a:pPr>
+            <a:r>
+              <a:rPr lang="en-US" sz="1300" dirty="0">
+                <a:solidFill>
+                  <a:srgbClr val="FFFFFF"/>
+                </a:solidFill>
+                <a:latin typeface="Yu Gothic" pitchFamily="34" charset="0"/>
+                <a:ea typeface="Yu Gothic" pitchFamily="34" charset="-122"/>
+                <a:cs typeface="Yu Gothic" pitchFamily="34" charset="-120"/>
+              </a:rPr>
+              <a:t>Pillowで色相リング・彩度明度パネルを1ピクセルずつ生成し、選択位置を白丸で可視化</a:t>
+            </a:r>
+            <a:endParaRPr lang="en-US" sz="1300" dirty="0"/>
+          </a:p>
+        </p:txBody>
+      </p:sp>
+      <p:sp>
+        <p:nvSpPr>
+          <p:cNvPr id="9" name="Shape 7"/>
+          <p:cNvSpPr/>
+          <p:nvPr/>
+        </p:nvSpPr>
+        <p:spPr>
+          <a:xfrm>
+            <a:off x="640080" y="4105656"/>
+            <a:ext cx="10881360" cy="1143000"/>
+          </a:xfrm>
+          <a:prstGeom prst="roundRect">
+            <a:avLst>
+              <a:gd name="adj" fmla="val 8000"/>
+            </a:avLst>
+          </a:prstGeom>
+          <a:solidFill>
+            <a:srgbClr val="E6A5F8">
+              <a:alpha val="10000"/>
+            </a:srgbClr>
+          </a:solidFill>
+          <a:ln/>
+        </p:spPr>
+      </p:sp>
+      <p:sp>
+        <p:nvSpPr>
+          <p:cNvPr id="10" name="Text 8"/>
+          <p:cNvSpPr/>
+          <p:nvPr/>
+        </p:nvSpPr>
+        <p:spPr>
+          <a:xfrm>
+            <a:off x="914400" y="4215384"/>
+            <a:ext cx="3291840" cy="914400"/>
+          </a:xfrm>
+          <a:prstGeom prst="rect">
+            <a:avLst/>
+          </a:prstGeom>
+          <a:noFill/>
+          <a:ln/>
+        </p:spPr>
+        <p:txBody>
+          <a:bodyPr wrap="square" lIns="0" tIns="0" rIns="0" bIns="0" rtlCol="0" anchor="ctr"/>
+          <a:lstStyle/>
+          <a:p>
+            <a:pPr indent="0" marL="0">
+              <a:buNone/>
+            </a:pPr>
+            <a:r>
+              <a:rPr lang="en-US" sz="1600" b="1" dirty="0">
+                <a:solidFill>
+                  <a:srgbClr val="FF6F9F"/>
+                </a:solidFill>
+                <a:latin typeface="Yu Gothic" pitchFamily="34" charset="0"/>
+                <a:ea typeface="Yu Gothic" pitchFamily="34" charset="-122"/>
+                <a:cs typeface="Yu Gothic" pitchFamily="34" charset="-120"/>
+              </a:rPr>
+              <a:t>成長するタグ設計</a:t>
+            </a:r>
+            <a:endParaRPr lang="en-US" sz="1600" dirty="0"/>
+          </a:p>
+        </p:txBody>
+      </p:sp>
+      <p:sp>
+        <p:nvSpPr>
+          <p:cNvPr id="11" name="Text 9"/>
+          <p:cNvSpPr/>
+          <p:nvPr/>
+        </p:nvSpPr>
+        <p:spPr>
+          <a:xfrm>
+            <a:off x="4389120" y="4215384"/>
+            <a:ext cx="6949440" cy="914400"/>
+          </a:xfrm>
+          <a:prstGeom prst="rect">
+            <a:avLst/>
+          </a:prstGeom>
+          <a:noFill/>
+          <a:ln/>
+        </p:spPr>
+        <p:txBody>
+          <a:bodyPr wrap="square" lIns="0" tIns="0" rIns="0" bIns="0" rtlCol="0" anchor="ctr"/>
+          <a:lstStyle/>
+          <a:p>
+            <a:pPr indent="0" marL="0">
+              <a:buNone/>
+            </a:pPr>
+            <a:r>
+              <a:rPr lang="en-US" sz="1300" dirty="0">
+                <a:solidFill>
+                  <a:srgbClr val="FFFFFF"/>
+                </a:solidFill>
+                <a:latin typeface="Yu Gothic" pitchFamily="34" charset="0"/>
+                <a:ea typeface="Yu Gothic" pitchFamily="34" charset="-122"/>
+                <a:cs typeface="Yu Gothic" pitchFamily="34" charset="-120"/>
+              </a:rPr>
+              <a:t>「イメージ」カテゴリはアース・ヴィンテージのように今後も語彙が増える前提で、新規追加分は自動で行を折り返す設計</a:t>
+            </a:r>
+            <a:endParaRPr lang="en-US" sz="1300" dirty="0"/>
+          </a:p>
+        </p:txBody>
+      </p:sp>
+      <p:sp>
+        <p:nvSpPr>
+          <p:cNvPr id="12" name="Shape 10"/>
+          <p:cNvSpPr/>
+          <p:nvPr/>
+        </p:nvSpPr>
+        <p:spPr>
+          <a:xfrm>
+            <a:off x="640080" y="5404104"/>
+            <a:ext cx="10881360" cy="1143000"/>
+          </a:xfrm>
+          <a:prstGeom prst="roundRect">
+            <a:avLst>
+              <a:gd name="adj" fmla="val 8000"/>
+            </a:avLst>
+          </a:prstGeom>
+          <a:solidFill>
+            <a:srgbClr val="E6A5F8">
+              <a:alpha val="10000"/>
+            </a:srgbClr>
+          </a:solidFill>
+          <a:ln/>
+        </p:spPr>
+      </p:sp>
+      <p:sp>
+        <p:nvSpPr>
+          <p:cNvPr id="13" name="Text 11"/>
+          <p:cNvSpPr/>
+          <p:nvPr/>
+        </p:nvSpPr>
+        <p:spPr>
+          <a:xfrm>
+            <a:off x="914400" y="5513832"/>
+            <a:ext cx="3291840" cy="914400"/>
+          </a:xfrm>
+          <a:prstGeom prst="rect">
+            <a:avLst/>
+          </a:prstGeom>
+          <a:noFill/>
+          <a:ln/>
+        </p:spPr>
+        <p:txBody>
+          <a:bodyPr wrap="square" lIns="0" tIns="0" rIns="0" bIns="0" rtlCol="0" anchor="ctr"/>
+          <a:lstStyle/>
+          <a:p>
+            <a:pPr indent="0" marL="0">
+              <a:buNone/>
+            </a:pPr>
+            <a:r>
+              <a:rPr lang="en-US" sz="1600" b="1" dirty="0">
+                <a:solidFill>
+                  <a:srgbClr val="FF6F9F"/>
+                </a:solidFill>
+                <a:latin typeface="Yu Gothic" pitchFamily="34" charset="0"/>
+                <a:ea typeface="Yu Gothic" pitchFamily="34" charset="-122"/>
+                <a:cs typeface="Yu Gothic" pitchFamily="34" charset="-120"/>
+              </a:rPr>
+              <a:t>役割ごとにツールを分離</a:t>
+            </a:r>
+            <a:endParaRPr lang="en-US" sz="1600" dirty="0"/>
+          </a:p>
+        </p:txBody>
+      </p:sp>
+      <p:sp>
+        <p:nvSpPr>
+          <p:cNvPr id="14" name="Text 12"/>
+          <p:cNvSpPr/>
+          <p:nvPr/>
+        </p:nvSpPr>
+        <p:spPr>
+          <a:xfrm>
+            <a:off x="4389120" y="5513832"/>
+            <a:ext cx="6949440" cy="914400"/>
+          </a:xfrm>
+          <a:prstGeom prst="rect">
+            <a:avLst/>
+          </a:prstGeom>
+          <a:noFill/>
+          <a:ln/>
+        </p:spPr>
+        <p:txBody>
+          <a:bodyPr wrap="square" lIns="0" tIns="0" rIns="0" bIns="0" rtlCol="0" anchor="ctr"/>
+          <a:lstStyle/>
+          <a:p>
+            <a:pPr indent="0" marL="0">
+              <a:buNone/>
+            </a:pPr>
+            <a:r>
+              <a:rPr lang="en-US" sz="1300" dirty="0">
+                <a:solidFill>
+                  <a:srgbClr val="FFFFFF"/>
+                </a:solidFill>
+                <a:latin typeface="Yu Gothic" pitchFamily="34" charset="0"/>
+                <a:ea typeface="Yu Gothic" pitchFamily="34" charset="-122"/>
+                <a:cs typeface="Yu Gothic" pitchFamily="34" charset="-120"/>
+              </a:rPr>
+              <a:t>本体アプリと大量データ登録用ツールを分け、それぞれの使い方に最適化</a:t>
+            </a:r>
+            <a:endParaRPr lang="en-US" sz="1300" dirty="0"/>
+          </a:p>
+        </p:txBody>
+      </p:sp>
+    </p:spTree>
+  </p:cSld>
+  <p:clrMapOvr>
+    <a:masterClrMapping/>
+  </p:clrMapOvr>
+</p:sld>
+</file>
+
+<file path=ppt/slides/slide11.xml><?xml version="1.0" encoding="utf-8"?>
+<p:sld xmlns:a="http://schemas.openxmlformats.org/drawingml/2006/main" xmlns:r="http://schemas.openxmlformats.org/officeDocument/2006/relationships" xmlns:p="http://schemas.openxmlformats.org/presentationml/2006/main">
+  <p:cSld name="Slide 11">
+    <p:bg>
+      <p:bgPr>
+        <a:solidFill>
           <a:srgbClr val="FFFFFF"/>
         </a:solidFill>
       </p:bgPr>
@@ -2882,8 +3450,8 @@
         </p:nvSpPr>
         <p:spPr>
           <a:xfrm>
-            <a:off x="640080" y="457200"/>
-            <a:ext cx="10058400" cy="640080"/>
+            <a:off x="640080" y="365760"/>
+            <a:ext cx="10058400" cy="548640"/>
           </a:xfrm>
           <a:prstGeom prst="rect">
             <a:avLst/>
@@ -2899,7 +3467,7 @@
               <a:buNone/>
             </a:pPr>
             <a:r>
-              <a:rPr lang="en-US" sz="3000" b="1" dirty="0">
+              <a:rPr lang="en-US" sz="2800" b="1" dirty="0">
                 <a:solidFill>
                   <a:srgbClr val="333333"/>
                 </a:solidFill>
@@ -2907,412 +3475,36 @@
                 <a:ea typeface="Yu Gothic" pitchFamily="34" charset="-122"/>
                 <a:cs typeface="Yu Gothic" pitchFamily="34" charset="-120"/>
               </a:rPr>
-              <a:t>使用技術</a:t>
-            </a:r>
-            <a:endParaRPr lang="en-US" sz="3000" dirty="0"/>
-          </a:p>
-        </p:txBody>
-      </p:sp>
-      <p:sp>
-        <p:nvSpPr>
-          <p:cNvPr id="3" name="Shape 1"/>
-          <p:cNvSpPr/>
-          <p:nvPr/>
-        </p:nvSpPr>
-        <p:spPr>
-          <a:xfrm>
-            <a:off x="640080" y="1737360"/>
-            <a:ext cx="10881360" cy="1051560"/>
-          </a:xfrm>
-          <a:prstGeom prst="roundRect">
-            <a:avLst>
-              <a:gd name="adj" fmla="val 10435"/>
-            </a:avLst>
-          </a:prstGeom>
-          <a:solidFill>
-            <a:srgbClr val="F9F0FC"/>
-          </a:solidFill>
-          <a:ln/>
-        </p:spPr>
-      </p:sp>
-      <p:sp>
-        <p:nvSpPr>
-          <p:cNvPr id="4" name="Text 2"/>
-          <p:cNvSpPr/>
-          <p:nvPr/>
-        </p:nvSpPr>
-        <p:spPr>
-          <a:xfrm>
-            <a:off x="914400" y="1847088"/>
-            <a:ext cx="2743200" cy="822960"/>
-          </a:xfrm>
-          <a:prstGeom prst="rect">
-            <a:avLst/>
-          </a:prstGeom>
-          <a:noFill/>
-          <a:ln/>
-        </p:spPr>
-        <p:txBody>
-          <a:bodyPr wrap="square" lIns="0" tIns="0" rIns="0" bIns="0" rtlCol="0" anchor="ctr"/>
-          <a:lstStyle/>
-          <a:p>
-            <a:pPr indent="0" marL="0">
-              <a:buNone/>
-            </a:pPr>
-            <a:r>
-              <a:rPr lang="en-US" sz="2000" b="1" dirty="0">
-                <a:solidFill>
-                  <a:srgbClr val="866091"/>
-                </a:solidFill>
-                <a:latin typeface="Yu Gothic" pitchFamily="34" charset="0"/>
-                <a:ea typeface="Yu Gothic" pitchFamily="34" charset="-122"/>
-                <a:cs typeface="Yu Gothic" pitchFamily="34" charset="-120"/>
-              </a:rPr>
-              <a:t>Python</a:t>
-            </a:r>
-            <a:endParaRPr lang="en-US" sz="2000" dirty="0"/>
-          </a:p>
-        </p:txBody>
-      </p:sp>
-      <p:sp>
-        <p:nvSpPr>
-          <p:cNvPr id="5" name="Text 3"/>
-          <p:cNvSpPr/>
-          <p:nvPr/>
-        </p:nvSpPr>
-        <p:spPr>
-          <a:xfrm>
-            <a:off x="3840480" y="1847088"/>
-            <a:ext cx="7498080" cy="822960"/>
-          </a:xfrm>
-          <a:prstGeom prst="rect">
-            <a:avLst/>
-          </a:prstGeom>
-          <a:noFill/>
-          <a:ln/>
-        </p:spPr>
-        <p:txBody>
-          <a:bodyPr wrap="square" lIns="0" tIns="0" rIns="0" bIns="0" rtlCol="0" anchor="ctr"/>
-          <a:lstStyle/>
-          <a:p>
-            <a:pPr indent="0" marL="0">
-              <a:buNone/>
-            </a:pPr>
-            <a:r>
-              <a:rPr lang="en-US" sz="1400" dirty="0">
-                <a:solidFill>
-                  <a:srgbClr val="333333"/>
-                </a:solidFill>
-                <a:latin typeface="Yu Gothic" pitchFamily="34" charset="0"/>
-                <a:ea typeface="Yu Gothic" pitchFamily="34" charset="-122"/>
-                <a:cs typeface="Yu Gothic" pitchFamily="34" charset="-120"/>
-              </a:rPr>
-              <a:t>開発言語</a:t>
-            </a:r>
-            <a:endParaRPr lang="en-US" sz="1400" dirty="0"/>
-          </a:p>
-        </p:txBody>
-      </p:sp>
-      <p:sp>
-        <p:nvSpPr>
-          <p:cNvPr id="6" name="Shape 4"/>
-          <p:cNvSpPr/>
-          <p:nvPr/>
-        </p:nvSpPr>
-        <p:spPr>
-          <a:xfrm>
-            <a:off x="640080" y="2971800"/>
-            <a:ext cx="10881360" cy="1051560"/>
-          </a:xfrm>
-          <a:prstGeom prst="roundRect">
-            <a:avLst>
-              <a:gd name="adj" fmla="val 10435"/>
-            </a:avLst>
-          </a:prstGeom>
-          <a:solidFill>
-            <a:srgbClr val="F9F0FC"/>
-          </a:solidFill>
-          <a:ln/>
-        </p:spPr>
-      </p:sp>
-      <p:sp>
-        <p:nvSpPr>
-          <p:cNvPr id="7" name="Text 5"/>
-          <p:cNvSpPr/>
-          <p:nvPr/>
-        </p:nvSpPr>
-        <p:spPr>
-          <a:xfrm>
-            <a:off x="914400" y="3081528"/>
-            <a:ext cx="2743200" cy="822960"/>
-          </a:xfrm>
-          <a:prstGeom prst="rect">
-            <a:avLst/>
-          </a:prstGeom>
-          <a:noFill/>
-          <a:ln/>
-        </p:spPr>
-        <p:txBody>
-          <a:bodyPr wrap="square" lIns="0" tIns="0" rIns="0" bIns="0" rtlCol="0" anchor="ctr"/>
-          <a:lstStyle/>
-          <a:p>
-            <a:pPr indent="0" marL="0">
-              <a:buNone/>
-            </a:pPr>
-            <a:r>
-              <a:rPr lang="en-US" sz="2000" b="1" dirty="0">
-                <a:solidFill>
-                  <a:srgbClr val="866091"/>
-                </a:solidFill>
-                <a:latin typeface="Yu Gothic" pitchFamily="34" charset="0"/>
-                <a:ea typeface="Yu Gothic" pitchFamily="34" charset="-122"/>
-                <a:cs typeface="Yu Gothic" pitchFamily="34" charset="-120"/>
-              </a:rPr>
-              <a:t>customtkinter</a:t>
-            </a:r>
-            <a:endParaRPr lang="en-US" sz="2000" dirty="0"/>
-          </a:p>
-        </p:txBody>
-      </p:sp>
-      <p:sp>
-        <p:nvSpPr>
-          <p:cNvPr id="8" name="Text 6"/>
-          <p:cNvSpPr/>
-          <p:nvPr/>
-        </p:nvSpPr>
-        <p:spPr>
-          <a:xfrm>
-            <a:off x="3840480" y="3081528"/>
-            <a:ext cx="7498080" cy="822960"/>
-          </a:xfrm>
-          <a:prstGeom prst="rect">
-            <a:avLst/>
-          </a:prstGeom>
-          <a:noFill/>
-          <a:ln/>
-        </p:spPr>
-        <p:txBody>
-          <a:bodyPr wrap="square" lIns="0" tIns="0" rIns="0" bIns="0" rtlCol="0" anchor="ctr"/>
-          <a:lstStyle/>
-          <a:p>
-            <a:pPr indent="0" marL="0">
-              <a:buNone/>
-            </a:pPr>
-            <a:r>
-              <a:rPr lang="en-US" sz="1400" dirty="0">
-                <a:solidFill>
-                  <a:srgbClr val="333333"/>
-                </a:solidFill>
-                <a:latin typeface="Yu Gothic" pitchFamily="34" charset="0"/>
-                <a:ea typeface="Yu Gothic" pitchFamily="34" charset="-122"/>
-                <a:cs typeface="Yu Gothic" pitchFamily="34" charset="-120"/>
-              </a:rPr>
-              <a:t>GUI画面の作成（ボタン・入力欄・色表示など）</a:t>
-            </a:r>
-            <a:endParaRPr lang="en-US" sz="1400" dirty="0"/>
-          </a:p>
-        </p:txBody>
-      </p:sp>
-      <p:sp>
-        <p:nvSpPr>
-          <p:cNvPr id="9" name="Shape 7"/>
-          <p:cNvSpPr/>
-          <p:nvPr/>
-        </p:nvSpPr>
-        <p:spPr>
-          <a:xfrm>
-            <a:off x="640080" y="4206240"/>
-            <a:ext cx="10881360" cy="1051560"/>
-          </a:xfrm>
-          <a:prstGeom prst="roundRect">
-            <a:avLst>
-              <a:gd name="adj" fmla="val 10435"/>
-            </a:avLst>
-          </a:prstGeom>
-          <a:solidFill>
-            <a:srgbClr val="F9F0FC"/>
-          </a:solidFill>
-          <a:ln/>
-        </p:spPr>
-      </p:sp>
-      <p:sp>
-        <p:nvSpPr>
-          <p:cNvPr id="10" name="Text 8"/>
-          <p:cNvSpPr/>
-          <p:nvPr/>
-        </p:nvSpPr>
-        <p:spPr>
-          <a:xfrm>
-            <a:off x="914400" y="4315968"/>
-            <a:ext cx="2743200" cy="822960"/>
-          </a:xfrm>
-          <a:prstGeom prst="rect">
-            <a:avLst/>
-          </a:prstGeom>
-          <a:noFill/>
-          <a:ln/>
-        </p:spPr>
-        <p:txBody>
-          <a:bodyPr wrap="square" lIns="0" tIns="0" rIns="0" bIns="0" rtlCol="0" anchor="ctr"/>
-          <a:lstStyle/>
-          <a:p>
-            <a:pPr indent="0" marL="0">
-              <a:buNone/>
-            </a:pPr>
-            <a:r>
-              <a:rPr lang="en-US" sz="2000" b="1" dirty="0">
-                <a:solidFill>
-                  <a:srgbClr val="866091"/>
-                </a:solidFill>
-                <a:latin typeface="Yu Gothic" pitchFamily="34" charset="0"/>
-                <a:ea typeface="Yu Gothic" pitchFamily="34" charset="-122"/>
-                <a:cs typeface="Yu Gothic" pitchFamily="34" charset="-120"/>
-              </a:rPr>
-              <a:t>Pillow</a:t>
-            </a:r>
-            <a:endParaRPr lang="en-US" sz="2000" dirty="0"/>
-          </a:p>
-        </p:txBody>
-      </p:sp>
-      <p:sp>
-        <p:nvSpPr>
-          <p:cNvPr id="11" name="Text 9"/>
-          <p:cNvSpPr/>
-          <p:nvPr/>
-        </p:nvSpPr>
-        <p:spPr>
-          <a:xfrm>
-            <a:off x="3840480" y="4315968"/>
-            <a:ext cx="7498080" cy="822960"/>
-          </a:xfrm>
-          <a:prstGeom prst="rect">
-            <a:avLst/>
-          </a:prstGeom>
-          <a:noFill/>
-          <a:ln/>
-        </p:spPr>
-        <p:txBody>
-          <a:bodyPr wrap="square" lIns="0" tIns="0" rIns="0" bIns="0" rtlCol="0" anchor="ctr"/>
-          <a:lstStyle/>
-          <a:p>
-            <a:pPr indent="0" marL="0">
-              <a:buNone/>
-            </a:pPr>
-            <a:r>
-              <a:rPr lang="en-US" sz="1400" dirty="0">
-                <a:solidFill>
-                  <a:srgbClr val="333333"/>
-                </a:solidFill>
-                <a:latin typeface="Yu Gothic" pitchFamily="34" charset="0"/>
-                <a:ea typeface="Yu Gothic" pitchFamily="34" charset="-122"/>
-                <a:cs typeface="Yu Gothic" pitchFamily="34" charset="-120"/>
-              </a:rPr>
-              <a:t>画像読み込み・スポイトによる色取得・カラーホイール生成</a:t>
-            </a:r>
-            <a:endParaRPr lang="en-US" sz="1400" dirty="0"/>
-          </a:p>
-        </p:txBody>
-      </p:sp>
-      <p:sp>
-        <p:nvSpPr>
-          <p:cNvPr id="12" name="Shape 10"/>
-          <p:cNvSpPr/>
-          <p:nvPr/>
-        </p:nvSpPr>
-        <p:spPr>
-          <a:xfrm>
-            <a:off x="640080" y="5440680"/>
-            <a:ext cx="10881360" cy="1051560"/>
-          </a:xfrm>
-          <a:prstGeom prst="roundRect">
-            <a:avLst>
-              <a:gd name="adj" fmla="val 10435"/>
-            </a:avLst>
-          </a:prstGeom>
-          <a:solidFill>
-            <a:srgbClr val="F9F0FC"/>
-          </a:solidFill>
-          <a:ln/>
-        </p:spPr>
-      </p:sp>
-      <p:sp>
-        <p:nvSpPr>
-          <p:cNvPr id="13" name="Text 11"/>
-          <p:cNvSpPr/>
-          <p:nvPr/>
-        </p:nvSpPr>
-        <p:spPr>
-          <a:xfrm>
-            <a:off x="914400" y="5550408"/>
-            <a:ext cx="2743200" cy="822960"/>
-          </a:xfrm>
-          <a:prstGeom prst="rect">
-            <a:avLst/>
-          </a:prstGeom>
-          <a:noFill/>
-          <a:ln/>
-        </p:spPr>
-        <p:txBody>
-          <a:bodyPr wrap="square" lIns="0" tIns="0" rIns="0" bIns="0" rtlCol="0" anchor="ctr"/>
-          <a:lstStyle/>
-          <a:p>
-            <a:pPr indent="0" marL="0">
-              <a:buNone/>
-            </a:pPr>
-            <a:r>
-              <a:rPr lang="en-US" sz="2000" b="1" dirty="0">
-                <a:solidFill>
-                  <a:srgbClr val="866091"/>
-                </a:solidFill>
-                <a:latin typeface="Yu Gothic" pitchFamily="34" charset="0"/>
-                <a:ea typeface="Yu Gothic" pitchFamily="34" charset="-122"/>
-                <a:cs typeface="Yu Gothic" pitchFamily="34" charset="-120"/>
-              </a:rPr>
-              <a:t>sqlite3</a:t>
-            </a:r>
-            <a:endParaRPr lang="en-US" sz="2000" dirty="0"/>
-          </a:p>
-        </p:txBody>
-      </p:sp>
-      <p:sp>
-        <p:nvSpPr>
-          <p:cNvPr id="14" name="Text 12"/>
-          <p:cNvSpPr/>
-          <p:nvPr/>
-        </p:nvSpPr>
-        <p:spPr>
-          <a:xfrm>
-            <a:off x="3840480" y="5550408"/>
-            <a:ext cx="7498080" cy="822960"/>
-          </a:xfrm>
-          <a:prstGeom prst="rect">
-            <a:avLst/>
-          </a:prstGeom>
-          <a:noFill/>
-          <a:ln/>
-        </p:spPr>
-        <p:txBody>
-          <a:bodyPr wrap="square" lIns="0" tIns="0" rIns="0" bIns="0" rtlCol="0" anchor="ctr"/>
-          <a:lstStyle/>
-          <a:p>
-            <a:pPr indent="0" marL="0">
-              <a:buNone/>
-            </a:pPr>
-            <a:r>
-              <a:rPr lang="en-US" sz="1400" dirty="0">
-                <a:solidFill>
-                  <a:srgbClr val="333333"/>
-                </a:solidFill>
-                <a:latin typeface="Yu Gothic" pitchFamily="34" charset="0"/>
-                <a:ea typeface="Yu Gothic" pitchFamily="34" charset="-122"/>
-                <a:cs typeface="Yu Gothic" pitchFamily="34" charset="-120"/>
-              </a:rPr>
-              <a:t>配色データ（300〜500件想定）の保存・検索</a:t>
-            </a:r>
-            <a:endParaRPr lang="en-US" sz="1400" dirty="0"/>
-          </a:p>
-        </p:txBody>
-      </p:sp>
+              <a:t>マインドマップ</a:t>
+            </a:r>
+            <a:endParaRPr lang="en-US" sz="2800" dirty="0"/>
+          </a:p>
+        </p:txBody>
+      </p:sp>
+      <p:pic>
+        <p:nvPicPr>
+          <p:cNvPr id="3" name="Image 0" descr="/home/claude/slides/mindmap.png">    </p:cNvPr>
+          <p:cNvPicPr>
+            <a:picLocks noChangeAspect="1"/>
+          </p:cNvPicPr>
+          <p:nvPr/>
+        </p:nvPicPr>
+        <p:blipFill>
+          <a:blip r:embed="rId1"/>
+          <a:stretch>
+            <a:fillRect/>
+          </a:stretch>
+        </p:blipFill>
+        <p:spPr>
+          <a:xfrm>
+            <a:off x="1748998" y="1051560"/>
+            <a:ext cx="8690956" cy="5623560"/>
+          </a:xfrm>
+          <a:prstGeom prst="rect">
+            <a:avLst/>
+          </a:prstGeom>
+        </p:spPr>
+      </p:pic>
     </p:spTree>
   </p:cSld>
   <p:clrMapOvr>
@@ -3378,7 +3570,7 @@
                 <a:ea typeface="Yu Gothic" pitchFamily="34" charset="-122"/>
                 <a:cs typeface="Yu Gothic" pitchFamily="34" charset="-120"/>
               </a:rPr>
-              <a:t>フォルダ構成</a:t>
+              <a:t>使用技術</a:t>
             </a:r>
             <a:endParaRPr lang="en-US" sz="3000" dirty="0"/>
           </a:p>
@@ -3386,14 +3578,36 @@
       </p:sp>
       <p:sp>
         <p:nvSpPr>
-          <p:cNvPr id="3" name="Text 1"/>
-          <p:cNvSpPr/>
-          <p:nvPr/>
-        </p:nvSpPr>
-        <p:spPr>
-          <a:xfrm>
-            <a:off x="640080" y="1051560"/>
-            <a:ext cx="10058400" cy="365760"/>
+          <p:cNvPr id="3" name="Shape 1"/>
+          <p:cNvSpPr/>
+          <p:nvPr/>
+        </p:nvSpPr>
+        <p:spPr>
+          <a:xfrm>
+            <a:off x="640080" y="1737360"/>
+            <a:ext cx="10881360" cy="1051560"/>
+          </a:xfrm>
+          <a:prstGeom prst="roundRect">
+            <a:avLst>
+              <a:gd name="adj" fmla="val 10435"/>
+            </a:avLst>
+          </a:prstGeom>
+          <a:solidFill>
+            <a:srgbClr val="F9F0FC"/>
+          </a:solidFill>
+          <a:ln/>
+        </p:spPr>
+      </p:sp>
+      <p:sp>
+        <p:nvSpPr>
+          <p:cNvPr id="4" name="Text 2"/>
+          <p:cNvSpPr/>
+          <p:nvPr/>
+        </p:nvSpPr>
+        <p:spPr>
+          <a:xfrm>
+            <a:off x="914400" y="1847088"/>
+            <a:ext cx="2743200" cy="822960"/>
           </a:xfrm>
           <a:prstGeom prst="rect">
             <a:avLst/>
@@ -3409,54 +3623,30 @@
               <a:buNone/>
             </a:pPr>
             <a:r>
-              <a:rPr lang="en-US" sz="1500" dirty="0">
-                <a:solidFill>
-                  <a:srgbClr val="666666"/>
-                </a:solidFill>
-                <a:latin typeface="Yu Gothic" pitchFamily="34" charset="0"/>
-                <a:ea typeface="Yu Gothic" pitchFamily="34" charset="-122"/>
-                <a:cs typeface="Yu Gothic" pitchFamily="34" charset="-120"/>
-              </a:rPr>
-              <a:t>Color Palette Maker</a:t>
-            </a:r>
-            <a:endParaRPr lang="en-US" sz="1500" dirty="0"/>
-          </a:p>
-        </p:txBody>
-      </p:sp>
-      <p:pic>
-        <p:nvPicPr>
-          <p:cNvPr id="4" name="Image 0" descr="/mnt/user-data/uploads/1785824169174_image.png">    </p:cNvPr>
-          <p:cNvPicPr>
-            <a:picLocks noChangeAspect="1"/>
-          </p:cNvPicPr>
-          <p:nvPr/>
-        </p:nvPicPr>
-        <p:blipFill>
-          <a:blip r:embed="rId1"/>
-          <a:stretch>
-            <a:fillRect/>
-          </a:stretch>
-        </p:blipFill>
-        <p:spPr>
-          <a:xfrm>
-            <a:off x="822960" y="1691640"/>
-            <a:ext cx="4114800" cy="4270248"/>
-          </a:xfrm>
-          <a:prstGeom prst="rect">
-            <a:avLst/>
-          </a:prstGeom>
-        </p:spPr>
-      </p:pic>
-      <p:sp>
-        <p:nvSpPr>
-          <p:cNvPr id="5" name="Text 2"/>
-          <p:cNvSpPr/>
-          <p:nvPr/>
-        </p:nvSpPr>
-        <p:spPr>
-          <a:xfrm>
-            <a:off x="5303520" y="1737360"/>
-            <a:ext cx="6035040" cy="4206240"/>
+              <a:rPr lang="en-US" sz="2000" b="1" dirty="0">
+                <a:solidFill>
+                  <a:srgbClr val="866091"/>
+                </a:solidFill>
+                <a:latin typeface="Yu Gothic" pitchFamily="34" charset="0"/>
+                <a:ea typeface="Yu Gothic" pitchFamily="34" charset="-122"/>
+                <a:cs typeface="Yu Gothic" pitchFamily="34" charset="-120"/>
+              </a:rPr>
+              <a:t>Python</a:t>
+            </a:r>
+            <a:endParaRPr lang="en-US" sz="2000" dirty="0"/>
+          </a:p>
+        </p:txBody>
+      </p:sp>
+      <p:sp>
+        <p:nvSpPr>
+          <p:cNvPr id="5" name="Text 3"/>
+          <p:cNvSpPr/>
+          <p:nvPr/>
+        </p:nvSpPr>
+        <p:spPr>
+          <a:xfrm>
+            <a:off x="3840480" y="1847088"/>
+            <a:ext cx="7498080" cy="822960"/>
           </a:xfrm>
           <a:prstGeom prst="rect">
             <a:avLst/>
@@ -3465,14 +3655,14 @@
           <a:ln/>
         </p:spPr>
         <p:txBody>
-          <a:bodyPr wrap="square" lIns="0" tIns="0" rIns="0" bIns="0" rtlCol="0" anchor="t"/>
-          <a:lstStyle/>
-          <a:p>
-            <a:pPr indent="0" marL="0">
-              <a:buNone/>
-            </a:pPr>
-            <a:r>
-              <a:rPr lang="en-US" sz="1500" b="1" dirty="0">
+          <a:bodyPr wrap="square" lIns="0" tIns="0" rIns="0" bIns="0" rtlCol="0" anchor="ctr"/>
+          <a:lstStyle/>
+          <a:p>
+            <a:pPr indent="0" marL="0">
+              <a:buNone/>
+            </a:pPr>
+            <a:r>
+              <a:rPr lang="en-US" sz="1400" dirty="0">
                 <a:solidFill>
                   <a:srgbClr val="333333"/>
                 </a:solidFill>
@@ -3480,19 +3670,99 @@
                 <a:ea typeface="Yu Gothic" pitchFamily="34" charset="-122"/>
                 <a:cs typeface="Yu Gothic" pitchFamily="34" charset="-120"/>
               </a:rPr>
-              <a:t>TEST03.PY</a:t>
-            </a:r>
-            <a:endParaRPr lang="en-US" sz="1500" dirty="0"/>
-          </a:p>
-          <a:p>
-            <a:pPr indent="0" marL="0">
-              <a:spcAft>
-                <a:spcPts val="1000"/>
-              </a:spcAft>
-              <a:buNone/>
-            </a:pPr>
-            <a:r>
-              <a:rPr lang="en-US" sz="1500" dirty="0">
+              <a:t>開発言語</a:t>
+            </a:r>
+            <a:endParaRPr lang="en-US" sz="1400" dirty="0"/>
+          </a:p>
+        </p:txBody>
+      </p:sp>
+      <p:sp>
+        <p:nvSpPr>
+          <p:cNvPr id="6" name="Shape 4"/>
+          <p:cNvSpPr/>
+          <p:nvPr/>
+        </p:nvSpPr>
+        <p:spPr>
+          <a:xfrm>
+            <a:off x="640080" y="2971800"/>
+            <a:ext cx="10881360" cy="1051560"/>
+          </a:xfrm>
+          <a:prstGeom prst="roundRect">
+            <a:avLst>
+              <a:gd name="adj" fmla="val 10435"/>
+            </a:avLst>
+          </a:prstGeom>
+          <a:solidFill>
+            <a:srgbClr val="F9F0FC"/>
+          </a:solidFill>
+          <a:ln/>
+        </p:spPr>
+      </p:sp>
+      <p:sp>
+        <p:nvSpPr>
+          <p:cNvPr id="7" name="Text 5"/>
+          <p:cNvSpPr/>
+          <p:nvPr/>
+        </p:nvSpPr>
+        <p:spPr>
+          <a:xfrm>
+            <a:off x="914400" y="3081528"/>
+            <a:ext cx="2743200" cy="822960"/>
+          </a:xfrm>
+          <a:prstGeom prst="rect">
+            <a:avLst/>
+          </a:prstGeom>
+          <a:noFill/>
+          <a:ln/>
+        </p:spPr>
+        <p:txBody>
+          <a:bodyPr wrap="square" lIns="0" tIns="0" rIns="0" bIns="0" rtlCol="0" anchor="ctr"/>
+          <a:lstStyle/>
+          <a:p>
+            <a:pPr indent="0" marL="0">
+              <a:buNone/>
+            </a:pPr>
+            <a:r>
+              <a:rPr lang="en-US" sz="2000" b="1" dirty="0">
+                <a:solidFill>
+                  <a:srgbClr val="866091"/>
+                </a:solidFill>
+                <a:latin typeface="Yu Gothic" pitchFamily="34" charset="0"/>
+                <a:ea typeface="Yu Gothic" pitchFamily="34" charset="-122"/>
+                <a:cs typeface="Yu Gothic" pitchFamily="34" charset="-120"/>
+              </a:rPr>
+              <a:t>customtkinter</a:t>
+            </a:r>
+            <a:endParaRPr lang="en-US" sz="2000" dirty="0"/>
+          </a:p>
+        </p:txBody>
+      </p:sp>
+      <p:sp>
+        <p:nvSpPr>
+          <p:cNvPr id="8" name="Text 6"/>
+          <p:cNvSpPr/>
+          <p:nvPr/>
+        </p:nvSpPr>
+        <p:spPr>
+          <a:xfrm>
+            <a:off x="3840480" y="3081528"/>
+            <a:ext cx="7498080" cy="822960"/>
+          </a:xfrm>
+          <a:prstGeom prst="rect">
+            <a:avLst/>
+          </a:prstGeom>
+          <a:noFill/>
+          <a:ln/>
+        </p:spPr>
+        <p:txBody>
+          <a:bodyPr wrap="square" lIns="0" tIns="0" rIns="0" bIns="0" rtlCol="0" anchor="ctr"/>
+          <a:lstStyle/>
+          <a:p>
+            <a:pPr indent="0" marL="0">
+              <a:buNone/>
+            </a:pPr>
+            <a:r>
+              <a:rPr lang="en-US" sz="1400" dirty="0">
                 <a:solidFill>
                   <a:srgbClr val="333333"/>
                 </a:solidFill>
@@ -3500,16 +3770,99 @@
                 <a:ea typeface="Yu Gothic" pitchFamily="34" charset="-122"/>
                 <a:cs typeface="Yu Gothic" pitchFamily="34" charset="-120"/>
               </a:rPr>
-              <a:t>　→ COLpama本体（GUIアプリ）</a:t>
-            </a:r>
-            <a:endParaRPr lang="en-US" sz="1500" dirty="0"/>
-          </a:p>
-          <a:p>
-            <a:pPr indent="0" marL="0">
-              <a:buNone/>
-            </a:pPr>
-            <a:r>
-              <a:rPr lang="en-US" sz="1500" b="1" dirty="0">
+              <a:t>GUI画面の作成（ボタン・入力欄・色表示など）</a:t>
+            </a:r>
+            <a:endParaRPr lang="en-US" sz="1400" dirty="0"/>
+          </a:p>
+        </p:txBody>
+      </p:sp>
+      <p:sp>
+        <p:nvSpPr>
+          <p:cNvPr id="9" name="Shape 7"/>
+          <p:cNvSpPr/>
+          <p:nvPr/>
+        </p:nvSpPr>
+        <p:spPr>
+          <a:xfrm>
+            <a:off x="640080" y="4206240"/>
+            <a:ext cx="10881360" cy="1051560"/>
+          </a:xfrm>
+          <a:prstGeom prst="roundRect">
+            <a:avLst>
+              <a:gd name="adj" fmla="val 10435"/>
+            </a:avLst>
+          </a:prstGeom>
+          <a:solidFill>
+            <a:srgbClr val="F9F0FC"/>
+          </a:solidFill>
+          <a:ln/>
+        </p:spPr>
+      </p:sp>
+      <p:sp>
+        <p:nvSpPr>
+          <p:cNvPr id="10" name="Text 8"/>
+          <p:cNvSpPr/>
+          <p:nvPr/>
+        </p:nvSpPr>
+        <p:spPr>
+          <a:xfrm>
+            <a:off x="914400" y="4315968"/>
+            <a:ext cx="2743200" cy="822960"/>
+          </a:xfrm>
+          <a:prstGeom prst="rect">
+            <a:avLst/>
+          </a:prstGeom>
+          <a:noFill/>
+          <a:ln/>
+        </p:spPr>
+        <p:txBody>
+          <a:bodyPr wrap="square" lIns="0" tIns="0" rIns="0" bIns="0" rtlCol="0" anchor="ctr"/>
+          <a:lstStyle/>
+          <a:p>
+            <a:pPr indent="0" marL="0">
+              <a:buNone/>
+            </a:pPr>
+            <a:r>
+              <a:rPr lang="en-US" sz="2000" b="1" dirty="0">
+                <a:solidFill>
+                  <a:srgbClr val="866091"/>
+                </a:solidFill>
+                <a:latin typeface="Yu Gothic" pitchFamily="34" charset="0"/>
+                <a:ea typeface="Yu Gothic" pitchFamily="34" charset="-122"/>
+                <a:cs typeface="Yu Gothic" pitchFamily="34" charset="-120"/>
+              </a:rPr>
+              <a:t>Pillow</a:t>
+            </a:r>
+            <a:endParaRPr lang="en-US" sz="2000" dirty="0"/>
+          </a:p>
+        </p:txBody>
+      </p:sp>
+      <p:sp>
+        <p:nvSpPr>
+          <p:cNvPr id="11" name="Text 9"/>
+          <p:cNvSpPr/>
+          <p:nvPr/>
+        </p:nvSpPr>
+        <p:spPr>
+          <a:xfrm>
+            <a:off x="3840480" y="4315968"/>
+            <a:ext cx="7498080" cy="822960"/>
+          </a:xfrm>
+          <a:prstGeom prst="rect">
+            <a:avLst/>
+          </a:prstGeom>
+          <a:noFill/>
+          <a:ln/>
+        </p:spPr>
+        <p:txBody>
+          <a:bodyPr wrap="square" lIns="0" tIns="0" rIns="0" bIns="0" rtlCol="0" anchor="ctr"/>
+          <a:lstStyle/>
+          <a:p>
+            <a:pPr indent="0" marL="0">
+              <a:buNone/>
+            </a:pPr>
+            <a:r>
+              <a:rPr lang="en-US" sz="1400" dirty="0">
                 <a:solidFill>
                   <a:srgbClr val="333333"/>
                 </a:solidFill>
@@ -3517,19 +3870,99 @@
                 <a:ea typeface="Yu Gothic" pitchFamily="34" charset="-122"/>
                 <a:cs typeface="Yu Gothic" pitchFamily="34" charset="-120"/>
               </a:rPr>
-              <a:t>preset_entry_tool.py</a:t>
-            </a:r>
-            <a:endParaRPr lang="en-US" sz="1500" dirty="0"/>
-          </a:p>
-          <a:p>
-            <a:pPr indent="0" marL="0">
-              <a:spcAft>
-                <a:spcPts val="1000"/>
-              </a:spcAft>
-              <a:buNone/>
-            </a:pPr>
-            <a:r>
-              <a:rPr lang="en-US" sz="1500" dirty="0">
+              <a:t>画像読み込み・スポイトによる色取得・カラーホイール生成</a:t>
+            </a:r>
+            <a:endParaRPr lang="en-US" sz="1400" dirty="0"/>
+          </a:p>
+        </p:txBody>
+      </p:sp>
+      <p:sp>
+        <p:nvSpPr>
+          <p:cNvPr id="12" name="Shape 10"/>
+          <p:cNvSpPr/>
+          <p:nvPr/>
+        </p:nvSpPr>
+        <p:spPr>
+          <a:xfrm>
+            <a:off x="640080" y="5440680"/>
+            <a:ext cx="10881360" cy="1051560"/>
+          </a:xfrm>
+          <a:prstGeom prst="roundRect">
+            <a:avLst>
+              <a:gd name="adj" fmla="val 10435"/>
+            </a:avLst>
+          </a:prstGeom>
+          <a:solidFill>
+            <a:srgbClr val="F9F0FC"/>
+          </a:solidFill>
+          <a:ln/>
+        </p:spPr>
+      </p:sp>
+      <p:sp>
+        <p:nvSpPr>
+          <p:cNvPr id="13" name="Text 11"/>
+          <p:cNvSpPr/>
+          <p:nvPr/>
+        </p:nvSpPr>
+        <p:spPr>
+          <a:xfrm>
+            <a:off x="914400" y="5550408"/>
+            <a:ext cx="2743200" cy="822960"/>
+          </a:xfrm>
+          <a:prstGeom prst="rect">
+            <a:avLst/>
+          </a:prstGeom>
+          <a:noFill/>
+          <a:ln/>
+        </p:spPr>
+        <p:txBody>
+          <a:bodyPr wrap="square" lIns="0" tIns="0" rIns="0" bIns="0" rtlCol="0" anchor="ctr"/>
+          <a:lstStyle/>
+          <a:p>
+            <a:pPr indent="0" marL="0">
+              <a:buNone/>
+            </a:pPr>
+            <a:r>
+              <a:rPr lang="en-US" sz="2000" b="1" dirty="0">
+                <a:solidFill>
+                  <a:srgbClr val="866091"/>
+                </a:solidFill>
+                <a:latin typeface="Yu Gothic" pitchFamily="34" charset="0"/>
+                <a:ea typeface="Yu Gothic" pitchFamily="34" charset="-122"/>
+                <a:cs typeface="Yu Gothic" pitchFamily="34" charset="-120"/>
+              </a:rPr>
+              <a:t>sqlite3</a:t>
+            </a:r>
+            <a:endParaRPr lang="en-US" sz="2000" dirty="0"/>
+          </a:p>
+        </p:txBody>
+      </p:sp>
+      <p:sp>
+        <p:nvSpPr>
+          <p:cNvPr id="14" name="Text 12"/>
+          <p:cNvSpPr/>
+          <p:nvPr/>
+        </p:nvSpPr>
+        <p:spPr>
+          <a:xfrm>
+            <a:off x="3840480" y="5550408"/>
+            <a:ext cx="7498080" cy="822960"/>
+          </a:xfrm>
+          <a:prstGeom prst="rect">
+            <a:avLst/>
+          </a:prstGeom>
+          <a:noFill/>
+          <a:ln/>
+        </p:spPr>
+        <p:txBody>
+          <a:bodyPr wrap="square" lIns="0" tIns="0" rIns="0" bIns="0" rtlCol="0" anchor="ctr"/>
+          <a:lstStyle/>
+          <a:p>
+            <a:pPr indent="0" marL="0">
+              <a:buNone/>
+            </a:pPr>
+            <a:r>
+              <a:rPr lang="en-US" sz="1400" dirty="0">
                 <a:solidFill>
                   <a:srgbClr val="333333"/>
                 </a:solidFill>
@@ -3537,80 +3970,9 @@
                 <a:ea typeface="Yu Gothic" pitchFamily="34" charset="-122"/>
                 <a:cs typeface="Yu Gothic" pitchFamily="34" charset="-120"/>
               </a:rPr>
-              <a:t>　→ データ登録専用ツール</a:t>
-            </a:r>
-            <a:endParaRPr lang="en-US" sz="1500" dirty="0"/>
-          </a:p>
-          <a:p>
-            <a:pPr indent="0" marL="0">
-              <a:buNone/>
-            </a:pPr>
-            <a:r>
-              <a:rPr lang="en-US" sz="1500" b="1" dirty="0">
-                <a:solidFill>
-                  <a:srgbClr val="333333"/>
-                </a:solidFill>
-                <a:latin typeface="Yu Gothic" pitchFamily="34" charset="0"/>
-                <a:ea typeface="Yu Gothic" pitchFamily="34" charset="-122"/>
-                <a:cs typeface="Yu Gothic" pitchFamily="34" charset="-120"/>
-              </a:rPr>
-              <a:t>colpama.db</a:t>
-            </a:r>
-            <a:endParaRPr lang="en-US" sz="1500" dirty="0"/>
-          </a:p>
-          <a:p>
-            <a:pPr indent="0" marL="0">
-              <a:spcAft>
-                <a:spcPts val="1000"/>
-              </a:spcAft>
-              <a:buNone/>
-            </a:pPr>
-            <a:r>
-              <a:rPr lang="en-US" sz="1500" dirty="0">
-                <a:solidFill>
-                  <a:srgbClr val="333333"/>
-                </a:solidFill>
-                <a:latin typeface="Yu Gothic" pitchFamily="34" charset="0"/>
-                <a:ea typeface="Yu Gothic" pitchFamily="34" charset="-122"/>
-                <a:cs typeface="Yu Gothic" pitchFamily="34" charset="-120"/>
-              </a:rPr>
-              <a:t>　→ SQLiteデータベース（両ファイルで共有）</a:t>
-            </a:r>
-            <a:endParaRPr lang="en-US" sz="1500" dirty="0"/>
-          </a:p>
-          <a:p>
-            <a:pPr indent="0" marL="0">
-              <a:buNone/>
-            </a:pPr>
-            <a:r>
-              <a:rPr lang="en-US" sz="1500" b="1" dirty="0">
-                <a:solidFill>
-                  <a:srgbClr val="333333"/>
-                </a:solidFill>
-                <a:latin typeface="Yu Gothic" pitchFamily="34" charset="0"/>
-                <a:ea typeface="Yu Gothic" pitchFamily="34" charset="-122"/>
-                <a:cs typeface="Yu Gothic" pitchFamily="34" charset="-120"/>
-              </a:rPr>
-              <a:t>images /</a:t>
-            </a:r>
-            <a:endParaRPr lang="en-US" sz="1500" dirty="0"/>
-          </a:p>
-          <a:p>
-            <a:pPr indent="0" marL="0">
-              <a:buNone/>
-            </a:pPr>
-            <a:r>
-              <a:rPr lang="en-US" sz="1500" dirty="0">
-                <a:solidFill>
-                  <a:srgbClr val="333333"/>
-                </a:solidFill>
-                <a:latin typeface="Yu Gothic" pitchFamily="34" charset="0"/>
-                <a:ea typeface="Yu Gothic" pitchFamily="34" charset="-122"/>
-                <a:cs typeface="Yu Gothic" pitchFamily="34" charset="-120"/>
-              </a:rPr>
-              <a:t>　→ トップ画像・工事中画像 等</a:t>
-            </a:r>
-            <a:endParaRPr lang="en-US" sz="1500" dirty="0"/>
+              <a:t>配色データ（300〜500件想定）の保存・検索</a:t>
+            </a:r>
+            <a:endParaRPr lang="en-US" sz="1400" dirty="0"/>
           </a:p>
         </p:txBody>
       </p:sp>
@@ -3655,7 +4017,7 @@
         <p:spPr>
           <a:xfrm>
             <a:off x="640080" y="365760"/>
-            <a:ext cx="10058400" cy="594360"/>
+            <a:ext cx="10058400" cy="548640"/>
           </a:xfrm>
           <a:prstGeom prst="rect">
             <a:avLst/>
@@ -3679,7 +4041,7 @@
                 <a:ea typeface="Yu Gothic" pitchFamily="34" charset="-122"/>
                 <a:cs typeface="Yu Gothic" pitchFamily="34" charset="-120"/>
               </a:rPr>
-              <a:t>UI設計 - 初期ラフ画</a:t>
+              <a:t>サイトマップ</a:t>
             </a:r>
             <a:endParaRPr lang="en-US" sz="2800" dirty="0"/>
           </a:p>
@@ -3718,7 +4080,7 @@
                 <a:ea typeface="Yu Gothic" pitchFamily="34" charset="-122"/>
                 <a:cs typeface="Yu Gothic" pitchFamily="34" charset="-120"/>
               </a:rPr>
-              <a:t>手描きで画面構成・操作フローを設計してから実装に着手</a:t>
+              <a:t>画面構成とUIの全体像</a:t>
             </a:r>
             <a:endParaRPr lang="en-US" sz="1400" dirty="0"/>
           </a:p>
@@ -3726,7 +4088,7 @@
       </p:sp>
       <p:pic>
         <p:nvPicPr>
-          <p:cNvPr id="4" name="Image 0" descr="/mnt/user-data/uploads/無題211_20260730130946.png">    </p:cNvPr>
+          <p:cNvPr id="4" name="Image 0" descr="/home/claude/slides/sitemap.png">    </p:cNvPr>
           <p:cNvPicPr>
             <a:picLocks noChangeAspect="1"/>
           </p:cNvPicPr>
@@ -3740,8 +4102,8 @@
         </p:blipFill>
         <p:spPr>
           <a:xfrm>
-            <a:off x="4892239" y="1417320"/>
-            <a:ext cx="2404474" cy="5120640"/>
+            <a:off x="516636" y="1371600"/>
+            <a:ext cx="11155680" cy="5188688"/>
           </a:xfrm>
           <a:prstGeom prst="rect">
             <a:avLst/>
@@ -3788,8 +4150,8 @@
         </p:nvSpPr>
         <p:spPr>
           <a:xfrm>
-            <a:off x="640080" y="457200"/>
-            <a:ext cx="10058400" cy="640080"/>
+            <a:off x="640080" y="365760"/>
+            <a:ext cx="10058400" cy="594360"/>
           </a:xfrm>
           <a:prstGeom prst="rect">
             <a:avLst/>
@@ -3805,7 +4167,7 @@
               <a:buNone/>
             </a:pPr>
             <a:r>
-              <a:rPr lang="en-US" sz="3000" b="1" dirty="0">
+              <a:rPr lang="en-US" sz="2800" b="1" dirty="0">
                 <a:solidFill>
                   <a:srgbClr val="333333"/>
                 </a:solidFill>
@@ -3813,15 +4175,54 @@
                 <a:ea typeface="Yu Gothic" pitchFamily="34" charset="-122"/>
                 <a:cs typeface="Yu Gothic" pitchFamily="34" charset="-120"/>
               </a:rPr>
-              <a:t>実装 - セレクト機能</a:t>
-            </a:r>
-            <a:endParaRPr lang="en-US" sz="3000" dirty="0"/>
+              <a:t>UI設計 - 初期ラフ画</a:t>
+            </a:r>
+            <a:endParaRPr lang="en-US" sz="2800" dirty="0"/>
+          </a:p>
+        </p:txBody>
+      </p:sp>
+      <p:sp>
+        <p:nvSpPr>
+          <p:cNvPr id="3" name="Text 1"/>
+          <p:cNvSpPr/>
+          <p:nvPr/>
+        </p:nvSpPr>
+        <p:spPr>
+          <a:xfrm>
+            <a:off x="640080" y="914400"/>
+            <a:ext cx="10058400" cy="365760"/>
+          </a:xfrm>
+          <a:prstGeom prst="rect">
+            <a:avLst/>
+          </a:prstGeom>
+          <a:noFill/>
+          <a:ln/>
+        </p:spPr>
+        <p:txBody>
+          <a:bodyPr wrap="square" lIns="0" tIns="0" rIns="0" bIns="0" rtlCol="0" anchor="ctr"/>
+          <a:lstStyle/>
+          <a:p>
+            <a:pPr indent="0" marL="0">
+              <a:buNone/>
+            </a:pPr>
+            <a:r>
+              <a:rPr lang="en-US" sz="1400" dirty="0">
+                <a:solidFill>
+                  <a:srgbClr val="666666"/>
+                </a:solidFill>
+                <a:latin typeface="Yu Gothic" pitchFamily="34" charset="0"/>
+                <a:ea typeface="Yu Gothic" pitchFamily="34" charset="-122"/>
+                <a:cs typeface="Yu Gothic" pitchFamily="34" charset="-120"/>
+              </a:rPr>
+              <a:t>手描きで画面構成・操作フローを設計してから実装に着手</a:t>
+            </a:r>
+            <a:endParaRPr lang="en-US" sz="1400" dirty="0"/>
           </a:p>
         </p:txBody>
       </p:sp>
       <p:pic>
         <p:nvPicPr>
-          <p:cNvPr id="3" name="Image 0" descr="/mnt/user-data/uploads/1785470992541_image.png">    </p:cNvPr>
+          <p:cNvPr id="4" name="Image 0" descr="/mnt/user-data/uploads/無題211_20260730130946.png">    </p:cNvPr>
           <p:cNvPicPr>
             <a:picLocks noChangeAspect="1"/>
           </p:cNvPicPr>
@@ -3835,181 +4236,14 @@
         </p:blipFill>
         <p:spPr>
           <a:xfrm>
-            <a:off x="822960" y="2377440"/>
-            <a:ext cx="5029200" cy="3416249"/>
+            <a:off x="4892239" y="1417320"/>
+            <a:ext cx="2404474" cy="5120640"/>
           </a:xfrm>
           <a:prstGeom prst="rect">
             <a:avLst/>
           </a:prstGeom>
         </p:spPr>
       </p:pic>
-      <p:sp>
-        <p:nvSpPr>
-          <p:cNvPr id="4" name="Text 1"/>
-          <p:cNvSpPr/>
-          <p:nvPr/>
-        </p:nvSpPr>
-        <p:spPr>
-          <a:xfrm>
-            <a:off x="6035040" y="1554480"/>
-            <a:ext cx="5486400" cy="4480560"/>
-          </a:xfrm>
-          <a:prstGeom prst="rect">
-            <a:avLst/>
-          </a:prstGeom>
-          <a:noFill/>
-          <a:ln/>
-        </p:spPr>
-        <p:txBody>
-          <a:bodyPr wrap="square" lIns="0" tIns="0" rIns="0" bIns="0" rtlCol="0" anchor="t"/>
-          <a:lstStyle/>
-          <a:p>
-            <a:pPr indent="0" marL="0">
-              <a:buNone/>
-            </a:pPr>
-            <a:r>
-              <a:rPr lang="en-US" sz="1400" b="1" dirty="0">
-                <a:solidFill>
-                  <a:srgbClr val="333333"/>
-                </a:solidFill>
-                <a:latin typeface="Yu Gothic" pitchFamily="34" charset="0"/>
-                <a:ea typeface="Yu Gothic" pitchFamily="34" charset="-122"/>
-                <a:cs typeface="Yu Gothic" pitchFamily="34" charset="-120"/>
-              </a:rPr>
-              <a:t>スポイト機能</a:t>
-            </a:r>
-            <a:endParaRPr lang="en-US" sz="1400" dirty="0"/>
-          </a:p>
-          <a:p>
-            <a:pPr indent="0" marL="0">
-              <a:spcAft>
-                <a:spcPts val="1200"/>
-              </a:spcAft>
-              <a:buNone/>
-            </a:pPr>
-            <a:r>
-              <a:rPr lang="en-US" sz="1400" dirty="0">
-                <a:solidFill>
-                  <a:srgbClr val="333333"/>
-                </a:solidFill>
-                <a:latin typeface="Yu Gothic" pitchFamily="34" charset="0"/>
-                <a:ea typeface="Yu Gothic" pitchFamily="34" charset="-122"/>
-                <a:cs typeface="Yu Gothic" pitchFamily="34" charset="-120"/>
-              </a:rPr>
-              <a:t>画面上のどこからでも色を取得（マルチモニタ対応）</a:t>
-            </a:r>
-            <a:endParaRPr lang="en-US" sz="1400" dirty="0"/>
-          </a:p>
-          <a:p>
-            <a:pPr indent="0" marL="0">
-              <a:buNone/>
-            </a:pPr>
-            <a:r>
-              <a:rPr lang="en-US" sz="1400" b="1" dirty="0">
-                <a:solidFill>
-                  <a:srgbClr val="333333"/>
-                </a:solidFill>
-                <a:latin typeface="Yu Gothic" pitchFamily="34" charset="0"/>
-                <a:ea typeface="Yu Gothic" pitchFamily="34" charset="-122"/>
-                <a:cs typeface="Yu Gothic" pitchFamily="34" charset="-120"/>
-              </a:rPr>
-              <a:t>カラーコード入力</a:t>
-            </a:r>
-            <a:endParaRPr lang="en-US" sz="1400" dirty="0"/>
-          </a:p>
-          <a:p>
-            <a:pPr indent="0" marL="0">
-              <a:spcAft>
-                <a:spcPts val="1200"/>
-              </a:spcAft>
-              <a:buNone/>
-            </a:pPr>
-            <a:r>
-              <a:rPr lang="en-US" sz="1400" dirty="0">
-                <a:solidFill>
-                  <a:srgbClr val="333333"/>
-                </a:solidFill>
-                <a:latin typeface="Yu Gothic" pitchFamily="34" charset="0"/>
-                <a:ea typeface="Yu Gothic" pitchFamily="34" charset="-122"/>
-                <a:cs typeface="Yu Gothic" pitchFamily="34" charset="-120"/>
-              </a:rPr>
-              <a:t>手入力・コピーの両方に対応</a:t>
-            </a:r>
-            <a:endParaRPr lang="en-US" sz="1400" dirty="0"/>
-          </a:p>
-          <a:p>
-            <a:pPr indent="0" marL="0">
-              <a:buNone/>
-            </a:pPr>
-            <a:r>
-              <a:rPr lang="en-US" sz="1400" b="1" dirty="0">
-                <a:solidFill>
-                  <a:srgbClr val="333333"/>
-                </a:solidFill>
-                <a:latin typeface="Yu Gothic" pitchFamily="34" charset="0"/>
-                <a:ea typeface="Yu Gothic" pitchFamily="34" charset="-122"/>
-                <a:cs typeface="Yu Gothic" pitchFamily="34" charset="-120"/>
-              </a:rPr>
-              <a:t>独自カラーピッカー</a:t>
-            </a:r>
-            <a:endParaRPr lang="en-US" sz="1400" dirty="0"/>
-          </a:p>
-          <a:p>
-            <a:pPr indent="0" marL="0">
-              <a:spcAft>
-                <a:spcPts val="1200"/>
-              </a:spcAft>
-              <a:buNone/>
-            </a:pPr>
-            <a:r>
-              <a:rPr lang="en-US" sz="1400" dirty="0">
-                <a:solidFill>
-                  <a:srgbClr val="333333"/>
-                </a:solidFill>
-                <a:latin typeface="Yu Gothic" pitchFamily="34" charset="0"/>
-                <a:ea typeface="Yu Gothic" pitchFamily="34" charset="-122"/>
-                <a:cs typeface="Yu Gothic" pitchFamily="34" charset="-120"/>
-              </a:rPr>
-              <a:t>色相リング＋彩度・明度パネルを自作</a:t>
-            </a:r>
-            <a:endParaRPr lang="en-US" sz="1400" dirty="0"/>
-          </a:p>
-          <a:p>
-            <a:pPr indent="0" marL="0">
-              <a:buNone/>
-            </a:pPr>
-            <a:r>
-              <a:rPr lang="en-US" sz="1400" b="1" dirty="0">
-                <a:solidFill>
-                  <a:srgbClr val="333333"/>
-                </a:solidFill>
-                <a:latin typeface="Yu Gothic" pitchFamily="34" charset="0"/>
-                <a:ea typeface="Yu Gothic" pitchFamily="34" charset="-122"/>
-                <a:cs typeface="Yu Gothic" pitchFamily="34" charset="-120"/>
-              </a:rPr>
-              <a:t>色プレビュー</a:t>
-            </a:r>
-            <a:endParaRPr lang="en-US" sz="1400" dirty="0"/>
-          </a:p>
-          <a:p>
-            <a:pPr indent="0" marL="0">
-              <a:buNone/>
-            </a:pPr>
-            <a:r>
-              <a:rPr lang="en-US" sz="1400" dirty="0">
-                <a:solidFill>
-                  <a:srgbClr val="333333"/>
-                </a:solidFill>
-                <a:latin typeface="Yu Gothic" pitchFamily="34" charset="0"/>
-                <a:ea typeface="Yu Gothic" pitchFamily="34" charset="-122"/>
-                <a:cs typeface="Yu Gothic" pitchFamily="34" charset="-120"/>
-              </a:rPr>
-              <a:t>選択中の色を大きく表示（白色は縁取りで視認性確保）</a:t>
-            </a:r>
-            <a:endParaRPr lang="en-US" sz="1400" dirty="0"/>
-          </a:p>
-        </p:txBody>
-      </p:sp>
     </p:spTree>
   </p:cSld>
   <p:clrMapOvr>
@@ -4051,7 +4285,7 @@
         <p:spPr>
           <a:xfrm>
             <a:off x="640080" y="457200"/>
-            <a:ext cx="10881360" cy="640080"/>
+            <a:ext cx="10058400" cy="640080"/>
           </a:xfrm>
           <a:prstGeom prst="rect">
             <a:avLst/>
@@ -4067,7 +4301,7 @@
               <a:buNone/>
             </a:pPr>
             <a:r>
-              <a:rPr lang="en-US" sz="2800" b="1" dirty="0">
+              <a:rPr lang="en-US" sz="3000" b="1" dirty="0">
                 <a:solidFill>
                   <a:srgbClr val="333333"/>
                 </a:solidFill>
@@ -4075,54 +4309,15 @@
                 <a:ea typeface="Yu Gothic" pitchFamily="34" charset="-122"/>
                 <a:cs typeface="Yu Gothic" pitchFamily="34" charset="-120"/>
               </a:rPr>
-              <a:t>実装 - データ登録専用ツール</a:t>
-            </a:r>
-            <a:endParaRPr lang="en-US" sz="2800" dirty="0"/>
-          </a:p>
-        </p:txBody>
-      </p:sp>
-      <p:sp>
-        <p:nvSpPr>
-          <p:cNvPr id="3" name="Text 1"/>
-          <p:cNvSpPr/>
-          <p:nvPr/>
-        </p:nvSpPr>
-        <p:spPr>
-          <a:xfrm>
-            <a:off x="640080" y="1051560"/>
-            <a:ext cx="10058400" cy="365760"/>
-          </a:xfrm>
-          <a:prstGeom prst="rect">
-            <a:avLst/>
-          </a:prstGeom>
-          <a:noFill/>
-          <a:ln/>
-        </p:spPr>
-        <p:txBody>
-          <a:bodyPr wrap="square" lIns="0" tIns="0" rIns="0" bIns="0" rtlCol="0" anchor="ctr"/>
-          <a:lstStyle/>
-          <a:p>
-            <a:pPr indent="0" marL="0">
-              <a:buNone/>
-            </a:pPr>
-            <a:r>
-              <a:rPr lang="en-US" sz="1400" dirty="0">
-                <a:solidFill>
-                  <a:srgbClr val="666666"/>
-                </a:solidFill>
-                <a:latin typeface="Yu Gothic" pitchFamily="34" charset="0"/>
-                <a:ea typeface="Yu Gothic" pitchFamily="34" charset="-122"/>
-                <a:cs typeface="Yu Gothic" pitchFamily="34" charset="-120"/>
-              </a:rPr>
-              <a:t>preset_entry_tool.py（COLpama本体とは別アプリ）</a:t>
-            </a:r>
-            <a:endParaRPr lang="en-US" sz="1400" dirty="0"/>
+              <a:t>実装 - セレクト機能</a:t>
+            </a:r>
+            <a:endParaRPr lang="en-US" sz="3000" dirty="0"/>
           </a:p>
         </p:txBody>
       </p:sp>
       <p:pic>
         <p:nvPicPr>
-          <p:cNvPr id="4" name="Image 0" descr="/mnt/user-data/uploads/スクリーンショット_2026-08-04_221308.png">    </p:cNvPr>
+          <p:cNvPr id="3" name="Image 0" descr="/mnt/user-data/uploads/1785470992541_image.png">    </p:cNvPr>
           <p:cNvPicPr>
             <a:picLocks noChangeAspect="1"/>
           </p:cNvPicPr>
@@ -4136,8 +4331,8 @@
         </p:blipFill>
         <p:spPr>
           <a:xfrm>
-            <a:off x="822960" y="1600200"/>
-            <a:ext cx="3144142" cy="4343400"/>
+            <a:off x="822960" y="2377440"/>
+            <a:ext cx="5029200" cy="3416249"/>
           </a:xfrm>
           <a:prstGeom prst="rect">
             <a:avLst/>
@@ -4146,14 +4341,14 @@
       </p:pic>
       <p:sp>
         <p:nvSpPr>
-          <p:cNvPr id="5" name="Text 2"/>
-          <p:cNvSpPr/>
-          <p:nvPr/>
-        </p:nvSpPr>
-        <p:spPr>
-          <a:xfrm>
-            <a:off x="6217920" y="1691640"/>
-            <a:ext cx="5394960" cy="4480560"/>
+          <p:cNvPr id="4" name="Text 1"/>
+          <p:cNvSpPr/>
+          <p:nvPr/>
+        </p:nvSpPr>
+        <p:spPr>
+          <a:xfrm>
+            <a:off x="6035040" y="1554480"/>
+            <a:ext cx="5486400" cy="4480560"/>
           </a:xfrm>
           <a:prstGeom prst="rect">
             <a:avLst/>
@@ -4166,33 +4361,67 @@
           <a:lstStyle/>
           <a:p>
             <a:pPr indent="0" marL="0">
+              <a:buNone/>
+            </a:pPr>
+            <a:r>
+              <a:rPr lang="en-US" sz="1400" b="1" dirty="0">
+                <a:solidFill>
+                  <a:srgbClr val="333333"/>
+                </a:solidFill>
+                <a:latin typeface="Yu Gothic" pitchFamily="34" charset="0"/>
+                <a:ea typeface="Yu Gothic" pitchFamily="34" charset="-122"/>
+                <a:cs typeface="Yu Gothic" pitchFamily="34" charset="-120"/>
+              </a:rPr>
+              <a:t>スポイト機能</a:t>
+            </a:r>
+            <a:endParaRPr lang="en-US" sz="1400" dirty="0"/>
+          </a:p>
+          <a:p>
+            <a:pPr indent="0" marL="0">
               <a:spcAft>
-                <a:spcPts val="600"/>
+                <a:spcPts val="1200"/>
               </a:spcAft>
               <a:buNone/>
             </a:pPr>
             <a:r>
-              <a:rPr lang="en-US" sz="1300" b="1" dirty="0">
-                <a:solidFill>
-                  <a:srgbClr val="866091"/>
-                </a:solidFill>
-                <a:latin typeface="Yu Gothic" pitchFamily="34" charset="0"/>
-                <a:ea typeface="Yu Gothic" pitchFamily="34" charset="-122"/>
-                <a:cs typeface="Yu Gothic" pitchFamily="34" charset="-120"/>
-              </a:rPr>
-              <a:t>なぜ別アプリにしたか</a:t>
-            </a:r>
-            <a:endParaRPr lang="en-US" sz="1300" dirty="0"/>
+              <a:rPr lang="en-US" sz="1400" dirty="0">
+                <a:solidFill>
+                  <a:srgbClr val="333333"/>
+                </a:solidFill>
+                <a:latin typeface="Yu Gothic" pitchFamily="34" charset="0"/>
+                <a:ea typeface="Yu Gothic" pitchFamily="34" charset="-122"/>
+                <a:cs typeface="Yu Gothic" pitchFamily="34" charset="-120"/>
+              </a:rPr>
+              <a:t>画面上のどこからでも色を取得（マルチモニタ対応）</a:t>
+            </a:r>
+            <a:endParaRPr lang="en-US" sz="1400" dirty="0"/>
+          </a:p>
+          <a:p>
+            <a:pPr indent="0" marL="0">
+              <a:buNone/>
+            </a:pPr>
+            <a:r>
+              <a:rPr lang="en-US" sz="1400" b="1" dirty="0">
+                <a:solidFill>
+                  <a:srgbClr val="333333"/>
+                </a:solidFill>
+                <a:latin typeface="Yu Gothic" pitchFamily="34" charset="0"/>
+                <a:ea typeface="Yu Gothic" pitchFamily="34" charset="-122"/>
+                <a:cs typeface="Yu Gothic" pitchFamily="34" charset="-120"/>
+              </a:rPr>
+              <a:t>カラーコード入力</a:t>
+            </a:r>
+            <a:endParaRPr lang="en-US" sz="1400" dirty="0"/>
           </a:p>
           <a:p>
             <a:pPr indent="0" marL="0">
               <a:spcAft>
-                <a:spcPts val="600"/>
+                <a:spcPts val="1200"/>
               </a:spcAft>
               <a:buNone/>
             </a:pPr>
             <a:r>
-              <a:rPr lang="en-US" sz="1300" dirty="0">
+              <a:rPr lang="en-US" sz="1400" dirty="0">
                 <a:solidFill>
                   <a:srgbClr val="333333"/>
                 </a:solidFill>
@@ -4200,19 +4429,36 @@
                 <a:ea typeface="Yu Gothic" pitchFamily="34" charset="-122"/>
                 <a:cs typeface="Yu Gothic" pitchFamily="34" charset="-120"/>
               </a:rPr>
-              <a:t>本アプリは300〜500件の配色データベースから3色を提案する設計。</a:t>
-            </a:r>
-            <a:endParaRPr lang="en-US" sz="1300" dirty="0"/>
+              <a:t>手入力・コピーの両方に対応</a:t>
+            </a:r>
+            <a:endParaRPr lang="en-US" sz="1400" dirty="0"/>
+          </a:p>
+          <a:p>
+            <a:pPr indent="0" marL="0">
+              <a:buNone/>
+            </a:pPr>
+            <a:r>
+              <a:rPr lang="en-US" sz="1400" b="1" dirty="0">
+                <a:solidFill>
+                  <a:srgbClr val="333333"/>
+                </a:solidFill>
+                <a:latin typeface="Yu Gothic" pitchFamily="34" charset="0"/>
+                <a:ea typeface="Yu Gothic" pitchFamily="34" charset="-122"/>
+                <a:cs typeface="Yu Gothic" pitchFamily="34" charset="-120"/>
+              </a:rPr>
+              <a:t>独自カラーピッカー</a:t>
+            </a:r>
+            <a:endParaRPr lang="en-US" sz="1400" dirty="0"/>
           </a:p>
           <a:p>
             <a:pPr indent="0" marL="0">
               <a:spcAft>
-                <a:spcPts val="1400"/>
+                <a:spcPts val="1200"/>
               </a:spcAft>
               <a:buNone/>
             </a:pPr>
             <a:r>
-              <a:rPr lang="en-US" sz="1300" dirty="0">
+              <a:rPr lang="en-US" sz="1400" dirty="0">
                 <a:solidFill>
                   <a:srgbClr val="333333"/>
                 </a:solidFill>
@@ -4220,40 +4466,16 @@
                 <a:ea typeface="Yu Gothic" pitchFamily="34" charset="-122"/>
                 <a:cs typeface="Yu Gothic" pitchFamily="34" charset="-120"/>
               </a:rPr>
-              <a:t>登録作業に特化した軽量ツールを分離することで、入力効率と保守性を両立。</a:t>
-            </a:r>
-            <a:endParaRPr lang="en-US" sz="1300" dirty="0"/>
-          </a:p>
-          <a:p>
-            <a:pPr indent="0" marL="0">
-              <a:spcAft>
-                <a:spcPts val="600"/>
-              </a:spcAft>
-              <a:buNone/>
-            </a:pPr>
-            <a:r>
-              <a:rPr lang="en-US" sz="1300" b="1" dirty="0">
-                <a:solidFill>
-                  <a:srgbClr val="866091"/>
-                </a:solidFill>
-                <a:latin typeface="Yu Gothic" pitchFamily="34" charset="0"/>
-                <a:ea typeface="Yu Gothic" pitchFamily="34" charset="-122"/>
-                <a:cs typeface="Yu Gothic" pitchFamily="34" charset="-120"/>
-              </a:rPr>
-              <a:t>主な機能</a:t>
-            </a:r>
-            <a:endParaRPr lang="en-US" sz="1300" dirty="0"/>
-          </a:p>
-          <a:p>
-            <a:pPr marL="342900" indent="-342900">
-              <a:spcAft>
-                <a:spcPts val="600"/>
-              </a:spcAft>
-              <a:buSzPct val="100000"/>
-              <a:buChar char="•"/>
-            </a:pPr>
-            <a:r>
-              <a:rPr lang="en-US" sz="1300" dirty="0">
+              <a:t>色相リング＋彩度・明度パネルを自作</a:t>
+            </a:r>
+            <a:endParaRPr lang="en-US" sz="1400" dirty="0"/>
+          </a:p>
+          <a:p>
+            <a:pPr indent="0" marL="0">
+              <a:buNone/>
+            </a:pPr>
+            <a:r>
+              <a:rPr lang="en-US" sz="1400" b="1" dirty="0">
                 <a:solidFill>
                   <a:srgbClr val="333333"/>
                 </a:solidFill>
@@ -4261,20 +4483,16 @@
                 <a:ea typeface="Yu Gothic" pitchFamily="34" charset="-122"/>
                 <a:cs typeface="Yu Gothic" pitchFamily="34" charset="-120"/>
               </a:rPr>
-              <a:t>ベース・アクセント・サブ、3色分のスポイト入力</a:t>
-            </a:r>
-            <a:endParaRPr lang="en-US" sz="1300" dirty="0"/>
-          </a:p>
-          <a:p>
-            <a:pPr marL="342900" indent="-342900">
-              <a:spcAft>
-                <a:spcPts val="600"/>
-              </a:spcAft>
-              <a:buSzPct val="100000"/>
-              <a:buChar char="•"/>
-            </a:pPr>
-            <a:r>
-              <a:rPr lang="en-US" sz="1300" dirty="0">
+              <a:t>色プレビュー</a:t>
+            </a:r>
+            <a:endParaRPr lang="en-US" sz="1400" dirty="0"/>
+          </a:p>
+          <a:p>
+            <a:pPr indent="0" marL="0">
+              <a:buNone/>
+            </a:pPr>
+            <a:r>
+              <a:rPr lang="en-US" sz="1400" dirty="0">
                 <a:solidFill>
                   <a:srgbClr val="333333"/>
                 </a:solidFill>
@@ -4282,51 +4500,9 @@
                 <a:ea typeface="Yu Gothic" pitchFamily="34" charset="-122"/>
                 <a:cs typeface="Yu Gothic" pitchFamily="34" charset="-120"/>
               </a:rPr>
-              <a:t>色比率の入力（既定値70:10:20、上書き可）</a:t>
-            </a:r>
-            <a:endParaRPr lang="en-US" sz="1300" dirty="0"/>
-          </a:p>
-          <a:p>
-            <a:pPr marL="342900" indent="-342900">
-              <a:spcAft>
-                <a:spcPts val="600"/>
-              </a:spcAft>
-              <a:buSzPct val="100000"/>
-              <a:buChar char="•"/>
-            </a:pPr>
-            <a:r>
-              <a:rPr lang="en-US" sz="1300" dirty="0">
-                <a:solidFill>
-                  <a:srgbClr val="333333"/>
-                </a:solidFill>
-                <a:latin typeface="Yu Gothic" pitchFamily="34" charset="0"/>
-                <a:ea typeface="Yu Gothic" pitchFamily="34" charset="-122"/>
-                <a:cs typeface="Yu Gothic" pitchFamily="34" charset="-120"/>
-              </a:rPr>
-              <a:t>タグの複数選択・新規追加（登録するたび項目が増える）</a:t>
-            </a:r>
-            <a:endParaRPr lang="en-US" sz="1300" dirty="0"/>
-          </a:p>
-          <a:p>
-            <a:pPr marL="342900" indent="-342900">
-              <a:spcAft>
-                <a:spcPts val="600"/>
-              </a:spcAft>
-              <a:buSzPct val="100000"/>
-              <a:buChar char="•"/>
-            </a:pPr>
-            <a:r>
-              <a:rPr lang="en-US" sz="1300" dirty="0">
-                <a:solidFill>
-                  <a:srgbClr val="333333"/>
-                </a:solidFill>
-                <a:latin typeface="Yu Gothic" pitchFamily="34" charset="0"/>
-                <a:ea typeface="Yu Gothic" pitchFamily="34" charset="-122"/>
-                <a:cs typeface="Yu Gothic" pitchFamily="34" charset="-120"/>
-              </a:rPr>
-              <a:t>登録するとSQLiteへ即時保存</a:t>
-            </a:r>
-            <a:endParaRPr lang="en-US" sz="1300" dirty="0"/>
+              <a:t>選択中の色を大きく表示（白色は縁取りで視認性確保）</a:t>
+            </a:r>
+            <a:endParaRPr lang="en-US" sz="1400" dirty="0"/>
           </a:p>
         </p:txBody>
       </p:sp>
@@ -4371,7 +4547,7 @@
         <p:spPr>
           <a:xfrm>
             <a:off x="640080" y="457200"/>
-            <a:ext cx="10058400" cy="640080"/>
+            <a:ext cx="10881360" cy="640080"/>
           </a:xfrm>
           <a:prstGeom prst="rect">
             <a:avLst/>
@@ -4387,7 +4563,7 @@
               <a:buNone/>
             </a:pPr>
             <a:r>
-              <a:rPr lang="en-US" sz="3000" b="1" dirty="0">
+              <a:rPr lang="en-US" sz="2800" b="1" dirty="0">
                 <a:solidFill>
                   <a:srgbClr val="333333"/>
                 </a:solidFill>
@@ -4395,9 +4571,9 @@
                 <a:ea typeface="Yu Gothic" pitchFamily="34" charset="-122"/>
                 <a:cs typeface="Yu Gothic" pitchFamily="34" charset="-120"/>
               </a:rPr>
-              <a:t>実装 - プリセット機能</a:t>
-            </a:r>
-            <a:endParaRPr lang="en-US" sz="3000" dirty="0"/>
+              <a:t>実装 - データ登録専用ツール</a:t>
+            </a:r>
+            <a:endParaRPr lang="en-US" sz="2800" dirty="0"/>
           </a:p>
         </p:txBody>
       </p:sp>
@@ -4434,7 +4610,7 @@
                 <a:ea typeface="Yu Gothic" pitchFamily="34" charset="-122"/>
                 <a:cs typeface="Yu Gothic" pitchFamily="34" charset="-120"/>
               </a:rPr>
-              <a:t>お気に入りの配色を6枠まで保存できる</a:t>
+              <a:t>preset_entry_tool.py（COLpama本体とは別アプリ）</a:t>
             </a:r>
             <a:endParaRPr lang="en-US" sz="1400" dirty="0"/>
           </a:p>
@@ -4442,7 +4618,7 @@
       </p:sp>
       <p:pic>
         <p:nvPicPr>
-          <p:cNvPr id="4" name="Image 0" descr="/mnt/user-data/uploads/1785814778687_image.png">    </p:cNvPr>
+          <p:cNvPr id="4" name="Image 0" descr="/mnt/user-data/uploads/スクリーンショット_2026-08-04_221308.png">    </p:cNvPr>
           <p:cNvPicPr>
             <a:picLocks noChangeAspect="1"/>
           </p:cNvPicPr>
@@ -4456,8 +4632,8 @@
         </p:blipFill>
         <p:spPr>
           <a:xfrm>
-            <a:off x="2894076" y="2194560"/>
-            <a:ext cx="6400800" cy="2801510"/>
+            <a:off x="822960" y="1600200"/>
+            <a:ext cx="3144142" cy="4343400"/>
           </a:xfrm>
           <a:prstGeom prst="rect">
             <a:avLst/>
@@ -4472,8 +4648,8 @@
         </p:nvSpPr>
         <p:spPr>
           <a:xfrm>
-            <a:off x="914400" y="5453270"/>
-            <a:ext cx="10332720" cy="731520"/>
+            <a:off x="6217920" y="1691640"/>
+            <a:ext cx="5394960" cy="4480560"/>
           </a:xfrm>
           <a:prstGeom prst="rect">
             <a:avLst/>
@@ -4482,14 +4658,37 @@
           <a:ln/>
         </p:spPr>
         <p:txBody>
-          <a:bodyPr wrap="square" lIns="0" tIns="0" rIns="0" bIns="0" rtlCol="0" anchor="ctr"/>
-          <a:lstStyle/>
-          <a:p>
-            <a:pPr algn="ctr" indent="0" marL="0">
-              <a:buNone/>
-            </a:pPr>
-            <a:r>
-              <a:rPr lang="en-US" sz="1400" dirty="0">
+          <a:bodyPr wrap="square" lIns="0" tIns="0" rIns="0" bIns="0" rtlCol="0" anchor="t"/>
+          <a:lstStyle/>
+          <a:p>
+            <a:pPr indent="0" marL="0">
+              <a:spcAft>
+                <a:spcPts val="600"/>
+              </a:spcAft>
+              <a:buNone/>
+            </a:pPr>
+            <a:r>
+              <a:rPr lang="en-US" sz="1300" b="1" dirty="0">
+                <a:solidFill>
+                  <a:srgbClr val="866091"/>
+                </a:solidFill>
+                <a:latin typeface="Yu Gothic" pitchFamily="34" charset="0"/>
+                <a:ea typeface="Yu Gothic" pitchFamily="34" charset="-122"/>
+                <a:cs typeface="Yu Gothic" pitchFamily="34" charset="-120"/>
+              </a:rPr>
+              <a:t>なぜ別アプリにしたか</a:t>
+            </a:r>
+            <a:endParaRPr lang="en-US" sz="1300" dirty="0"/>
+          </a:p>
+          <a:p>
+            <a:pPr indent="0" marL="0">
+              <a:spcAft>
+                <a:spcPts val="600"/>
+              </a:spcAft>
+              <a:buNone/>
+            </a:pPr>
+            <a:r>
+              <a:rPr lang="en-US" sz="1300" dirty="0">
                 <a:solidFill>
                   <a:srgbClr val="333333"/>
                 </a:solidFill>
@@ -4497,9 +4696,133 @@
                 <a:ea typeface="Yu Gothic" pitchFamily="34" charset="-122"/>
                 <a:cs typeface="Yu Gothic" pitchFamily="34" charset="-120"/>
               </a:rPr>
-              <a:t>各色のHEXコードを表示し、ワンクリックでコピー可能。1〜6のタブで配色を切り替え、名前を付けて管理できる。</a:t>
-            </a:r>
-            <a:endParaRPr lang="en-US" sz="1400" dirty="0"/>
+              <a:t>本アプリは300〜500件の配色データベースから3色を提案する設計。</a:t>
+            </a:r>
+            <a:endParaRPr lang="en-US" sz="1300" dirty="0"/>
+          </a:p>
+          <a:p>
+            <a:pPr indent="0" marL="0">
+              <a:spcAft>
+                <a:spcPts val="1400"/>
+              </a:spcAft>
+              <a:buNone/>
+            </a:pPr>
+            <a:r>
+              <a:rPr lang="en-US" sz="1300" dirty="0">
+                <a:solidFill>
+                  <a:srgbClr val="333333"/>
+                </a:solidFill>
+                <a:latin typeface="Yu Gothic" pitchFamily="34" charset="0"/>
+                <a:ea typeface="Yu Gothic" pitchFamily="34" charset="-122"/>
+                <a:cs typeface="Yu Gothic" pitchFamily="34" charset="-120"/>
+              </a:rPr>
+              <a:t>登録作業に特化した軽量ツールを分離することで、入力効率と保守性を両立。</a:t>
+            </a:r>
+            <a:endParaRPr lang="en-US" sz="1300" dirty="0"/>
+          </a:p>
+          <a:p>
+            <a:pPr indent="0" marL="0">
+              <a:spcAft>
+                <a:spcPts val="600"/>
+              </a:spcAft>
+              <a:buNone/>
+            </a:pPr>
+            <a:r>
+              <a:rPr lang="en-US" sz="1300" b="1" dirty="0">
+                <a:solidFill>
+                  <a:srgbClr val="866091"/>
+                </a:solidFill>
+                <a:latin typeface="Yu Gothic" pitchFamily="34" charset="0"/>
+                <a:ea typeface="Yu Gothic" pitchFamily="34" charset="-122"/>
+                <a:cs typeface="Yu Gothic" pitchFamily="34" charset="-120"/>
+              </a:rPr>
+              <a:t>主な機能</a:t>
+            </a:r>
+            <a:endParaRPr lang="en-US" sz="1300" dirty="0"/>
+          </a:p>
+          <a:p>
+            <a:pPr marL="342900" indent="-342900">
+              <a:spcAft>
+                <a:spcPts val="600"/>
+              </a:spcAft>
+              <a:buSzPct val="100000"/>
+              <a:buChar char="•"/>
+            </a:pPr>
+            <a:r>
+              <a:rPr lang="en-US" sz="1300" dirty="0">
+                <a:solidFill>
+                  <a:srgbClr val="333333"/>
+                </a:solidFill>
+                <a:latin typeface="Yu Gothic" pitchFamily="34" charset="0"/>
+                <a:ea typeface="Yu Gothic" pitchFamily="34" charset="-122"/>
+                <a:cs typeface="Yu Gothic" pitchFamily="34" charset="-120"/>
+              </a:rPr>
+              <a:t>ベース・アクセント・サブ、3色分のスポイト入力</a:t>
+            </a:r>
+            <a:endParaRPr lang="en-US" sz="1300" dirty="0"/>
+          </a:p>
+          <a:p>
+            <a:pPr marL="342900" indent="-342900">
+              <a:spcAft>
+                <a:spcPts val="600"/>
+              </a:spcAft>
+              <a:buSzPct val="100000"/>
+              <a:buChar char="•"/>
+            </a:pPr>
+            <a:r>
+              <a:rPr lang="en-US" sz="1300" dirty="0">
+                <a:solidFill>
+                  <a:srgbClr val="333333"/>
+                </a:solidFill>
+                <a:latin typeface="Yu Gothic" pitchFamily="34" charset="0"/>
+                <a:ea typeface="Yu Gothic" pitchFamily="34" charset="-122"/>
+                <a:cs typeface="Yu Gothic" pitchFamily="34" charset="-120"/>
+              </a:rPr>
+              <a:t>色比率の入力（既定値70:10:20、上書き可）</a:t>
+            </a:r>
+            <a:endParaRPr lang="en-US" sz="1300" dirty="0"/>
+          </a:p>
+          <a:p>
+            <a:pPr marL="342900" indent="-342900">
+              <a:spcAft>
+                <a:spcPts val="600"/>
+              </a:spcAft>
+              <a:buSzPct val="100000"/>
+              <a:buChar char="•"/>
+            </a:pPr>
+            <a:r>
+              <a:rPr lang="en-US" sz="1300" dirty="0">
+                <a:solidFill>
+                  <a:srgbClr val="333333"/>
+                </a:solidFill>
+                <a:latin typeface="Yu Gothic" pitchFamily="34" charset="0"/>
+                <a:ea typeface="Yu Gothic" pitchFamily="34" charset="-122"/>
+                <a:cs typeface="Yu Gothic" pitchFamily="34" charset="-120"/>
+              </a:rPr>
+              <a:t>タグの複数選択・新規追加（登録するたび項目が増える）</a:t>
+            </a:r>
+            <a:endParaRPr lang="en-US" sz="1300" dirty="0"/>
+          </a:p>
+          <a:p>
+            <a:pPr marL="342900" indent="-342900">
+              <a:spcAft>
+                <a:spcPts val="600"/>
+              </a:spcAft>
+              <a:buSzPct val="100000"/>
+              <a:buChar char="•"/>
+            </a:pPr>
+            <a:r>
+              <a:rPr lang="en-US" sz="1300" dirty="0">
+                <a:solidFill>
+                  <a:srgbClr val="333333"/>
+                </a:solidFill>
+                <a:latin typeface="Yu Gothic" pitchFamily="34" charset="0"/>
+                <a:ea typeface="Yu Gothic" pitchFamily="34" charset="-122"/>
+                <a:cs typeface="Yu Gothic" pitchFamily="34" charset="-120"/>
+              </a:rPr>
+              <a:t>登録するとSQLiteへ即時保存</a:t>
+            </a:r>
+            <a:endParaRPr lang="en-US" sz="1300" dirty="0"/>
           </a:p>
         </p:txBody>
       </p:sp>
@@ -4517,7 +4840,7 @@
     <p:bg>
       <p:bgPr>
         <a:solidFill>
-          <a:srgbClr val="3B1D35"/>
+          <a:srgbClr val="FFFFFF"/>
         </a:solidFill>
       </p:bgPr>
     </p:bg>
@@ -4562,13 +4885,13 @@
             <a:r>
               <a:rPr lang="en-US" sz="3000" b="1" dirty="0">
                 <a:solidFill>
-                  <a:srgbClr val="FFFFFF"/>
-                </a:solidFill>
-                <a:latin typeface="Yu Gothic" pitchFamily="34" charset="0"/>
-                <a:ea typeface="Yu Gothic" pitchFamily="34" charset="-122"/>
-                <a:cs typeface="Yu Gothic" pitchFamily="34" charset="-120"/>
-              </a:rPr>
-              <a:t>こだわった点・工夫</a:t>
+                  <a:srgbClr val="333333"/>
+                </a:solidFill>
+                <a:latin typeface="Yu Gothic" pitchFamily="34" charset="0"/>
+                <a:ea typeface="Yu Gothic" pitchFamily="34" charset="-122"/>
+                <a:cs typeface="Yu Gothic" pitchFamily="34" charset="-120"/>
+              </a:rPr>
+              <a:t>実装 - プリセット機能</a:t>
             </a:r>
             <a:endParaRPr lang="en-US" sz="3000" dirty="0"/>
           </a:p>
@@ -4576,38 +4899,14 @@
       </p:sp>
       <p:sp>
         <p:nvSpPr>
-          <p:cNvPr id="3" name="Shape 1"/>
-          <p:cNvSpPr/>
-          <p:nvPr/>
-        </p:nvSpPr>
-        <p:spPr>
-          <a:xfrm>
-            <a:off x="640080" y="1508760"/>
-            <a:ext cx="10881360" cy="1143000"/>
-          </a:xfrm>
-          <a:prstGeom prst="roundRect">
-            <a:avLst>
-              <a:gd name="adj" fmla="val 8000"/>
-            </a:avLst>
-          </a:prstGeom>
-          <a:solidFill>
-            <a:srgbClr val="E6A5F8">
-              <a:alpha val="10000"/>
-            </a:srgbClr>
-          </a:solidFill>
-          <a:ln/>
-        </p:spPr>
-      </p:sp>
-      <p:sp>
-        <p:nvSpPr>
-          <p:cNvPr id="4" name="Text 2"/>
-          <p:cNvSpPr/>
-          <p:nvPr/>
-        </p:nvSpPr>
-        <p:spPr>
-          <a:xfrm>
-            <a:off x="914400" y="1618488"/>
-            <a:ext cx="3291840" cy="914400"/>
+          <p:cNvPr id="3" name="Text 1"/>
+          <p:cNvSpPr/>
+          <p:nvPr/>
+        </p:nvSpPr>
+        <p:spPr>
+          <a:xfrm>
+            <a:off x="640080" y="1051560"/>
+            <a:ext cx="10058400" cy="365760"/>
           </a:xfrm>
           <a:prstGeom prst="rect">
             <a:avLst/>
@@ -4623,30 +4922,54 @@
               <a:buNone/>
             </a:pPr>
             <a:r>
-              <a:rPr lang="en-US" sz="1600" b="1" dirty="0">
-                <a:solidFill>
-                  <a:srgbClr val="FF6F9F"/>
-                </a:solidFill>
-                <a:latin typeface="Yu Gothic" pitchFamily="34" charset="0"/>
-                <a:ea typeface="Yu Gothic" pitchFamily="34" charset="-122"/>
-                <a:cs typeface="Yu Gothic" pitchFamily="34" charset="-120"/>
-              </a:rPr>
-              <a:t>リアルタイム色プレビュー</a:t>
-            </a:r>
-            <a:endParaRPr lang="en-US" sz="1600" dirty="0"/>
-          </a:p>
-        </p:txBody>
-      </p:sp>
-      <p:sp>
-        <p:nvSpPr>
-          <p:cNvPr id="5" name="Text 3"/>
-          <p:cNvSpPr/>
-          <p:nvPr/>
-        </p:nvSpPr>
-        <p:spPr>
-          <a:xfrm>
-            <a:off x="4389120" y="1618488"/>
-            <a:ext cx="6949440" cy="914400"/>
+              <a:rPr lang="en-US" sz="1400" dirty="0">
+                <a:solidFill>
+                  <a:srgbClr val="666666"/>
+                </a:solidFill>
+                <a:latin typeface="Yu Gothic" pitchFamily="34" charset="0"/>
+                <a:ea typeface="Yu Gothic" pitchFamily="34" charset="-122"/>
+                <a:cs typeface="Yu Gothic" pitchFamily="34" charset="-120"/>
+              </a:rPr>
+              <a:t>お気に入りの配色を6枠まで保存できる</a:t>
+            </a:r>
+            <a:endParaRPr lang="en-US" sz="1400" dirty="0"/>
+          </a:p>
+        </p:txBody>
+      </p:sp>
+      <p:pic>
+        <p:nvPicPr>
+          <p:cNvPr id="4" name="Image 0" descr="/mnt/user-data/uploads/1785814778687_image.png">    </p:cNvPr>
+          <p:cNvPicPr>
+            <a:picLocks noChangeAspect="1"/>
+          </p:cNvPicPr>
+          <p:nvPr/>
+        </p:nvPicPr>
+        <p:blipFill>
+          <a:blip r:embed="rId1"/>
+          <a:stretch>
+            <a:fillRect/>
+          </a:stretch>
+        </p:blipFill>
+        <p:spPr>
+          <a:xfrm>
+            <a:off x="2894076" y="2194560"/>
+            <a:ext cx="6400800" cy="2801510"/>
+          </a:xfrm>
+          <a:prstGeom prst="rect">
+            <a:avLst/>
+          </a:prstGeom>
+        </p:spPr>
+      </p:pic>
+      <p:sp>
+        <p:nvSpPr>
+          <p:cNvPr id="5" name="Text 2"/>
+          <p:cNvSpPr/>
+          <p:nvPr/>
+        </p:nvSpPr>
+        <p:spPr>
+          <a:xfrm>
+            <a:off x="914400" y="5453270"/>
+            <a:ext cx="10332720" cy="731520"/>
           </a:xfrm>
           <a:prstGeom prst="rect">
             <a:avLst/>
@@ -4658,327 +4981,21 @@
           <a:bodyPr wrap="square" lIns="0" tIns="0" rIns="0" bIns="0" rtlCol="0" anchor="ctr"/>
           <a:lstStyle/>
           <a:p>
-            <a:pPr indent="0" marL="0">
-              <a:buNone/>
-            </a:pPr>
-            <a:r>
-              <a:rPr lang="en-US" sz="1300" dirty="0">
-                <a:solidFill>
-                  <a:srgbClr val="FFFFFF"/>
-                </a:solidFill>
-                <a:latin typeface="Yu Gothic" pitchFamily="34" charset="0"/>
-                <a:ea typeface="Yu Gothic" pitchFamily="34" charset="-122"/>
-                <a:cs typeface="Yu Gothic" pitchFamily="34" charset="-120"/>
-              </a:rPr>
-              <a:t>スポイトを動かすたびに色コードとカラーピッカーの位置が連動して更新される</a:t>
-            </a:r>
-            <a:endParaRPr lang="en-US" sz="1300" dirty="0"/>
-          </a:p>
-        </p:txBody>
-      </p:sp>
-      <p:sp>
-        <p:nvSpPr>
-          <p:cNvPr id="6" name="Shape 4"/>
-          <p:cNvSpPr/>
-          <p:nvPr/>
-        </p:nvSpPr>
-        <p:spPr>
-          <a:xfrm>
-            <a:off x="640080" y="2807208"/>
-            <a:ext cx="10881360" cy="1143000"/>
-          </a:xfrm>
-          <a:prstGeom prst="roundRect">
-            <a:avLst>
-              <a:gd name="adj" fmla="val 8000"/>
-            </a:avLst>
-          </a:prstGeom>
-          <a:solidFill>
-            <a:srgbClr val="E6A5F8">
-              <a:alpha val="10000"/>
-            </a:srgbClr>
-          </a:solidFill>
-          <a:ln/>
-        </p:spPr>
-      </p:sp>
-      <p:sp>
-        <p:nvSpPr>
-          <p:cNvPr id="7" name="Text 5"/>
-          <p:cNvSpPr/>
-          <p:nvPr/>
-        </p:nvSpPr>
-        <p:spPr>
-          <a:xfrm>
-            <a:off x="914400" y="2916936"/>
-            <a:ext cx="3291840" cy="914400"/>
-          </a:xfrm>
-          <a:prstGeom prst="rect">
-            <a:avLst/>
-          </a:prstGeom>
-          <a:noFill/>
-          <a:ln/>
-        </p:spPr>
-        <p:txBody>
-          <a:bodyPr wrap="square" lIns="0" tIns="0" rIns="0" bIns="0" rtlCol="0" anchor="ctr"/>
-          <a:lstStyle/>
-          <a:p>
-            <a:pPr indent="0" marL="0">
-              <a:buNone/>
-            </a:pPr>
-            <a:r>
-              <a:rPr lang="en-US" sz="1600" b="1" dirty="0">
-                <a:solidFill>
-                  <a:srgbClr val="FF6F9F"/>
-                </a:solidFill>
-                <a:latin typeface="Yu Gothic" pitchFamily="34" charset="0"/>
-                <a:ea typeface="Yu Gothic" pitchFamily="34" charset="-122"/>
-                <a:cs typeface="Yu Gothic" pitchFamily="34" charset="-120"/>
-              </a:rPr>
-              <a:t>自作カラーピッカー</a:t>
-            </a:r>
-            <a:endParaRPr lang="en-US" sz="1600" dirty="0"/>
-          </a:p>
-        </p:txBody>
-      </p:sp>
-      <p:sp>
-        <p:nvSpPr>
-          <p:cNvPr id="8" name="Text 6"/>
-          <p:cNvSpPr/>
-          <p:nvPr/>
-        </p:nvSpPr>
-        <p:spPr>
-          <a:xfrm>
-            <a:off x="4389120" y="2916936"/>
-            <a:ext cx="6949440" cy="914400"/>
-          </a:xfrm>
-          <a:prstGeom prst="rect">
-            <a:avLst/>
-          </a:prstGeom>
-          <a:noFill/>
-          <a:ln/>
-        </p:spPr>
-        <p:txBody>
-          <a:bodyPr wrap="square" lIns="0" tIns="0" rIns="0" bIns="0" rtlCol="0" anchor="ctr"/>
-          <a:lstStyle/>
-          <a:p>
-            <a:pPr indent="0" marL="0">
-              <a:buNone/>
-            </a:pPr>
-            <a:r>
-              <a:rPr lang="en-US" sz="1300" dirty="0">
-                <a:solidFill>
-                  <a:srgbClr val="FFFFFF"/>
-                </a:solidFill>
-                <a:latin typeface="Yu Gothic" pitchFamily="34" charset="0"/>
-                <a:ea typeface="Yu Gothic" pitchFamily="34" charset="-122"/>
-                <a:cs typeface="Yu Gothic" pitchFamily="34" charset="-120"/>
-              </a:rPr>
-              <a:t>Pillowで色相リング・彩度明度パネルを1ピクセルずつ生成し、選択位置を白丸で可視化</a:t>
-            </a:r>
-            <a:endParaRPr lang="en-US" sz="1300" dirty="0"/>
-          </a:p>
-        </p:txBody>
-      </p:sp>
-      <p:sp>
-        <p:nvSpPr>
-          <p:cNvPr id="9" name="Shape 7"/>
-          <p:cNvSpPr/>
-          <p:nvPr/>
-        </p:nvSpPr>
-        <p:spPr>
-          <a:xfrm>
-            <a:off x="640080" y="4105656"/>
-            <a:ext cx="10881360" cy="1143000"/>
-          </a:xfrm>
-          <a:prstGeom prst="roundRect">
-            <a:avLst>
-              <a:gd name="adj" fmla="val 8000"/>
-            </a:avLst>
-          </a:prstGeom>
-          <a:solidFill>
-            <a:srgbClr val="E6A5F8">
-              <a:alpha val="10000"/>
-            </a:srgbClr>
-          </a:solidFill>
-          <a:ln/>
-        </p:spPr>
-      </p:sp>
-      <p:sp>
-        <p:nvSpPr>
-          <p:cNvPr id="10" name="Text 8"/>
-          <p:cNvSpPr/>
-          <p:nvPr/>
-        </p:nvSpPr>
-        <p:spPr>
-          <a:xfrm>
-            <a:off x="914400" y="4215384"/>
-            <a:ext cx="3291840" cy="914400"/>
-          </a:xfrm>
-          <a:prstGeom prst="rect">
-            <a:avLst/>
-          </a:prstGeom>
-          <a:noFill/>
-          <a:ln/>
-        </p:spPr>
-        <p:txBody>
-          <a:bodyPr wrap="square" lIns="0" tIns="0" rIns="0" bIns="0" rtlCol="0" anchor="ctr"/>
-          <a:lstStyle/>
-          <a:p>
-            <a:pPr indent="0" marL="0">
-              <a:buNone/>
-            </a:pPr>
-            <a:r>
-              <a:rPr lang="en-US" sz="1600" b="1" dirty="0">
-                <a:solidFill>
-                  <a:srgbClr val="FF6F9F"/>
-                </a:solidFill>
-                <a:latin typeface="Yu Gothic" pitchFamily="34" charset="0"/>
-                <a:ea typeface="Yu Gothic" pitchFamily="34" charset="-122"/>
-                <a:cs typeface="Yu Gothic" pitchFamily="34" charset="-120"/>
-              </a:rPr>
-              <a:t>成長するタグ設計</a:t>
-            </a:r>
-            <a:endParaRPr lang="en-US" sz="1600" dirty="0"/>
-          </a:p>
-        </p:txBody>
-      </p:sp>
-      <p:sp>
-        <p:nvSpPr>
-          <p:cNvPr id="11" name="Text 9"/>
-          <p:cNvSpPr/>
-          <p:nvPr/>
-        </p:nvSpPr>
-        <p:spPr>
-          <a:xfrm>
-            <a:off x="4389120" y="4215384"/>
-            <a:ext cx="6949440" cy="914400"/>
-          </a:xfrm>
-          <a:prstGeom prst="rect">
-            <a:avLst/>
-          </a:prstGeom>
-          <a:noFill/>
-          <a:ln/>
-        </p:spPr>
-        <p:txBody>
-          <a:bodyPr wrap="square" lIns="0" tIns="0" rIns="0" bIns="0" rtlCol="0" anchor="ctr"/>
-          <a:lstStyle/>
-          <a:p>
-            <a:pPr indent="0" marL="0">
-              <a:buNone/>
-            </a:pPr>
-            <a:r>
-              <a:rPr lang="en-US" sz="1300" dirty="0">
-                <a:solidFill>
-                  <a:srgbClr val="FFFFFF"/>
-                </a:solidFill>
-                <a:latin typeface="Yu Gothic" pitchFamily="34" charset="0"/>
-                <a:ea typeface="Yu Gothic" pitchFamily="34" charset="-122"/>
-                <a:cs typeface="Yu Gothic" pitchFamily="34" charset="-120"/>
-              </a:rPr>
-              <a:t>「イメージ」カテゴリはアース・ヴィンテージのように今後も語彙が増える前提で、新規追加分は自動で行を折り返す設計</a:t>
-            </a:r>
-            <a:endParaRPr lang="en-US" sz="1300" dirty="0"/>
-          </a:p>
-        </p:txBody>
-      </p:sp>
-      <p:sp>
-        <p:nvSpPr>
-          <p:cNvPr id="12" name="Shape 10"/>
-          <p:cNvSpPr/>
-          <p:nvPr/>
-        </p:nvSpPr>
-        <p:spPr>
-          <a:xfrm>
-            <a:off x="640080" y="5404104"/>
-            <a:ext cx="10881360" cy="1143000"/>
-          </a:xfrm>
-          <a:prstGeom prst="roundRect">
-            <a:avLst>
-              <a:gd name="adj" fmla="val 8000"/>
-            </a:avLst>
-          </a:prstGeom>
-          <a:solidFill>
-            <a:srgbClr val="E6A5F8">
-              <a:alpha val="10000"/>
-            </a:srgbClr>
-          </a:solidFill>
-          <a:ln/>
-        </p:spPr>
-      </p:sp>
-      <p:sp>
-        <p:nvSpPr>
-          <p:cNvPr id="13" name="Text 11"/>
-          <p:cNvSpPr/>
-          <p:nvPr/>
-        </p:nvSpPr>
-        <p:spPr>
-          <a:xfrm>
-            <a:off x="914400" y="5513832"/>
-            <a:ext cx="3291840" cy="914400"/>
-          </a:xfrm>
-          <a:prstGeom prst="rect">
-            <a:avLst/>
-          </a:prstGeom>
-          <a:noFill/>
-          <a:ln/>
-        </p:spPr>
-        <p:txBody>
-          <a:bodyPr wrap="square" lIns="0" tIns="0" rIns="0" bIns="0" rtlCol="0" anchor="ctr"/>
-          <a:lstStyle/>
-          <a:p>
-            <a:pPr indent="0" marL="0">
-              <a:buNone/>
-            </a:pPr>
-            <a:r>
-              <a:rPr lang="en-US" sz="1600" b="1" dirty="0">
-                <a:solidFill>
-                  <a:srgbClr val="FF6F9F"/>
-                </a:solidFill>
-                <a:latin typeface="Yu Gothic" pitchFamily="34" charset="0"/>
-                <a:ea typeface="Yu Gothic" pitchFamily="34" charset="-122"/>
-                <a:cs typeface="Yu Gothic" pitchFamily="34" charset="-120"/>
-              </a:rPr>
-              <a:t>役割ごとにツールを分離</a:t>
-            </a:r>
-            <a:endParaRPr lang="en-US" sz="1600" dirty="0"/>
-          </a:p>
-        </p:txBody>
-      </p:sp>
-      <p:sp>
-        <p:nvSpPr>
-          <p:cNvPr id="14" name="Text 12"/>
-          <p:cNvSpPr/>
-          <p:nvPr/>
-        </p:nvSpPr>
-        <p:spPr>
-          <a:xfrm>
-            <a:off x="4389120" y="5513832"/>
-            <a:ext cx="6949440" cy="914400"/>
-          </a:xfrm>
-          <a:prstGeom prst="rect">
-            <a:avLst/>
-          </a:prstGeom>
-          <a:noFill/>
-          <a:ln/>
-        </p:spPr>
-        <p:txBody>
-          <a:bodyPr wrap="square" lIns="0" tIns="0" rIns="0" bIns="0" rtlCol="0" anchor="ctr"/>
-          <a:lstStyle/>
-          <a:p>
-            <a:pPr indent="0" marL="0">
-              <a:buNone/>
-            </a:pPr>
-            <a:r>
-              <a:rPr lang="en-US" sz="1300" dirty="0">
-                <a:solidFill>
-                  <a:srgbClr val="FFFFFF"/>
-                </a:solidFill>
-                <a:latin typeface="Yu Gothic" pitchFamily="34" charset="0"/>
-                <a:ea typeface="Yu Gothic" pitchFamily="34" charset="-122"/>
-                <a:cs typeface="Yu Gothic" pitchFamily="34" charset="-120"/>
-              </a:rPr>
-              <a:t>本体アプリと大量データ登録用ツールを分け、それぞれの使い方に最適化</a:t>
-            </a:r>
-            <a:endParaRPr lang="en-US" sz="1300" dirty="0"/>
+            <a:pPr algn="ctr" indent="0" marL="0">
+              <a:buNone/>
+            </a:pPr>
+            <a:r>
+              <a:rPr lang="en-US" sz="1400" dirty="0">
+                <a:solidFill>
+                  <a:srgbClr val="333333"/>
+                </a:solidFill>
+                <a:latin typeface="Yu Gothic" pitchFamily="34" charset="0"/>
+                <a:ea typeface="Yu Gothic" pitchFamily="34" charset="-122"/>
+                <a:cs typeface="Yu Gothic" pitchFamily="34" charset="-120"/>
+              </a:rPr>
+              <a:t>各色のHEXコードを表示し、ワンクリックでコピー可能。1〜6のタブで配色を切り替え、名前を付けて管理できる。</a:t>
+            </a:r>
+            <a:endParaRPr lang="en-US" sz="1400" dirty="0"/>
           </a:p>
         </p:txBody>
       </p:sp>
